--- a/CheckMate_DemoDay.pptx
+++ b/CheckMate_DemoDay.pptx
@@ -1376,7 +1376,7 @@
           <a:p>
             <a:r>
               <a:rPr lang="en-US" dirty="0"/>
-              <a:t>Walk the loop once: the scanned exam hits the Supervisor; it calls Transcriber (reads all pages, splits into questions), then loops per question through Retriever, Verifier, Grader, and optionally Reflector, then returns. Key line: the Supervisor decides the order — that is the autonomy. Verifier is deterministic code, not an LLM. All LLM calls use GPT-4o-mini.</a:t>
+              <a:t>Fixed pipeline, no central orchestrator or planner: OCR (Reader) -&gt; rubric match (Retriever, direct lookup + RAG) -&gt; score + feedback (Grader) -&gt; reflection check (Reflector) -&gt; result. Questions run in parallel on gpt-5.4-mini. The only decision point is the conditional reflection step, shown next. No open tool-selection loop, no multi-agent controller.</a:t>
             </a:r>
             <a:endParaRPr lang="en-US" dirty="0"/>
           </a:p>
@@ -1464,7 +1464,7 @@
           <a:p>
             <a:r>
               <a:rPr lang="en-US" dirty="0"/>
-              <a:t>This is the detailed architecture. Name the course patterns you combined: Supervisor + ReAct as the orchestrator, RAG for retrieval, a deterministic SymPy tool, a few-shot Grader, and conditional Reflection. Stress the bottom line: the Supervisor is not a third model — it is the same GPT-4o-mini running a tool-calling loop, and each tool call is logged to steps[]. That keeps it autonomous and within budget.</a:t>
+              <a:t>Frame this honestly: the system is NOT fully autonomous. It is a fixed pipeline with limited, question-level autonomy at one step. The Reflector may only choose among four actions: APPROVE, REVISE, RETRY_OCR, ESCALATE_TO_TEACHER. Hard caps: at most one revise and one OCR retry; after that it must approve or escalate. Minimal state carried: extracted_answer, proposed_score, feedback, confidence, reflection_decision, retry_count, requires_teacher_review. This keeps response time short, cost low, and the process transparent for the teacher — no long loops, no wasted calls.</a:t>
             </a:r>
             <a:endParaRPr lang="en-US" dirty="0"/>
           </a:p>
@@ -1552,7 +1552,7 @@
           <a:p>
             <a:r>
               <a:rPr lang="en-US" dirty="0"/>
-              <a:t>This is the slide the course grades hardest: agent vs workflow. Emphasize dynamic control flow and self-correction via reflection. Say the word 'autonomous' out loud.</a:t>
+              <a:t>Reliability rests on three things: grounding (retrieval of the official solution + rubric), reflection, and knowing when to refuse. Grounding is the key anti-hallucination point — grades follow the material, not the model's memory. Budget and speed are handled in the caption.</a:t>
             </a:r>
             <a:endParaRPr lang="en-US" dirty="0"/>
           </a:p>
@@ -1640,7 +1640,7 @@
           <a:p>
             <a:r>
               <a:rPr lang="en-US" dirty="0"/>
-              <a:t>Three trust/efficiency points. The budget line answers the project's efficiency requirement directly. The 'knows when to defer' point pre-empts the obvious 'but can it read handwriting?' question.</a:t>
+              <a:t>UI is required (it's in the project guidelines). Keep it minimal: upload an exam, see the grade + per-question feedback, and open the steps[] trace. Numbers here are illustrative.</a:t>
             </a:r>
             <a:endParaRPr lang="en-US" dirty="0"/>
           </a:p>
@@ -2055,7 +2055,7 @@
       </p:sp>
       <p:pic>
         <p:nvPicPr>
-          <p:cNvPr id="4" name="Image 0" descr="preencoded.png">    </p:cNvPr>
+          <p:cNvPr id="4" name="Image 0" descr="preencoded.png"/>
           <p:cNvPicPr>
             <a:picLocks noChangeAspect="1"/>
           </p:cNvPicPr>
@@ -2481,7 +2481,7 @@
       </p:sp>
       <p:pic>
         <p:nvPicPr>
-          <p:cNvPr id="10" name="Image 0" descr="preencoded.png">    </p:cNvPr>
+          <p:cNvPr id="10" name="Image 0" descr="preencoded.png"/>
           <p:cNvPicPr>
             <a:picLocks noChangeAspect="1"/>
           </p:cNvPicPr>
@@ -2606,7 +2606,7 @@
       </p:sp>
       <p:pic>
         <p:nvPicPr>
-          <p:cNvPr id="14" name="Image 1" descr="preencoded.png">    </p:cNvPr>
+          <p:cNvPr id="14" name="Image 1" descr="preencoded.png"/>
           <p:cNvPicPr>
             <a:picLocks noChangeAspect="1"/>
           </p:cNvPicPr>
@@ -2731,7 +2731,7 @@
       </p:sp>
       <p:pic>
         <p:nvPicPr>
-          <p:cNvPr id="18" name="Image 2" descr="preencoded.png">    </p:cNvPr>
+          <p:cNvPr id="18" name="Image 2" descr="preencoded.png"/>
           <p:cNvPicPr>
             <a:picLocks noChangeAspect="1"/>
           </p:cNvPicPr>
@@ -2907,7 +2907,7 @@
       </p:grpSpPr>
       <p:pic>
         <p:nvPicPr>
-          <p:cNvPr id="2" name="Image 0" descr="preencoded.png">    </p:cNvPr>
+          <p:cNvPr id="2" name="Image 0" descr="preencoded.png"/>
           <p:cNvPicPr>
             <a:picLocks noChangeAspect="1"/>
           </p:cNvPicPr>
@@ -3215,7 +3215,7 @@
       </p:sp>
       <p:pic>
         <p:nvPicPr>
-          <p:cNvPr id="6" name="Image 0" descr="preencoded.png">    </p:cNvPr>
+          <p:cNvPr id="6" name="Image 0" descr="preencoded.png"/>
           <p:cNvPicPr>
             <a:picLocks noChangeAspect="1"/>
           </p:cNvPicPr>
@@ -3374,7 +3374,7 @@
       </p:sp>
       <p:pic>
         <p:nvPicPr>
-          <p:cNvPr id="11" name="Image 1" descr="preencoded.png">    </p:cNvPr>
+          <p:cNvPr id="11" name="Image 1" descr="preencoded.png"/>
           <p:cNvPicPr>
             <a:picLocks noChangeAspect="1"/>
           </p:cNvPicPr>
@@ -3533,7 +3533,7 @@
       </p:sp>
       <p:pic>
         <p:nvPicPr>
-          <p:cNvPr id="16" name="Image 2" descr="preencoded.png">    </p:cNvPr>
+          <p:cNvPr id="16" name="Image 2" descr="preencoded.png"/>
           <p:cNvPicPr>
             <a:picLocks noChangeAspect="1"/>
           </p:cNvPicPr>
@@ -3670,7 +3670,7 @@
       </p:grpSpPr>
       <p:pic>
         <p:nvPicPr>
-          <p:cNvPr id="2" name="Image 0" descr="preencoded.png">    </p:cNvPr>
+          <p:cNvPr id="2" name="Image 0" descr="preencoded.png"/>
           <p:cNvPicPr>
             <a:picLocks noChangeAspect="1"/>
           </p:cNvPicPr>
@@ -3954,7 +3954,7 @@
       </p:sp>
       <p:pic>
         <p:nvPicPr>
-          <p:cNvPr id="5" name="Image 0" descr="preencoded.png">    </p:cNvPr>
+          <p:cNvPr id="5" name="Image 0" descr="preencoded.png"/>
           <p:cNvPicPr>
             <a:picLocks noChangeAspect="1"/>
           </p:cNvPicPr>
@@ -4017,7 +4017,7 @@
       </p:sp>
       <p:pic>
         <p:nvPicPr>
-          <p:cNvPr id="7" name="Image 1" descr="preencoded.png">    </p:cNvPr>
+          <p:cNvPr id="7" name="Image 1" descr="preencoded.png"/>
           <p:cNvPicPr>
             <a:picLocks noChangeAspect="1"/>
           </p:cNvPicPr>
@@ -4070,7 +4070,7 @@
       </p:sp>
       <p:pic>
         <p:nvPicPr>
-          <p:cNvPr id="9" name="Image 2" descr="preencoded.png">    </p:cNvPr>
+          <p:cNvPr id="9" name="Image 2" descr="preencoded.png"/>
           <p:cNvPicPr>
             <a:picLocks noChangeAspect="1"/>
           </p:cNvPicPr>
@@ -4133,7 +4133,7 @@
       </p:sp>
       <p:pic>
         <p:nvPicPr>
-          <p:cNvPr id="11" name="Image 3" descr="preencoded.png">    </p:cNvPr>
+          <p:cNvPr id="11" name="Image 3" descr="preencoded.png"/>
           <p:cNvPicPr>
             <a:picLocks noChangeAspect="1"/>
           </p:cNvPicPr>
@@ -4186,7 +4186,7 @@
       </p:sp>
       <p:pic>
         <p:nvPicPr>
-          <p:cNvPr id="13" name="Image 4" descr="preencoded.png">    </p:cNvPr>
+          <p:cNvPr id="13" name="Image 4" descr="preencoded.png"/>
           <p:cNvPicPr>
             <a:picLocks noChangeAspect="1"/>
           </p:cNvPicPr>
@@ -4971,15 +4971,15 @@
         <p:spPr>
           <a:xfrm>
             <a:off x="548640" y="1234440"/>
-            <a:ext cx="2103120" cy="457200"/>
+            <a:ext cx="1371600" cy="530352"/>
           </a:xfrm>
           <a:prstGeom prst="roundRect">
             <a:avLst>
-              <a:gd name="adj" fmla="val 16000"/>
+              <a:gd name="adj" fmla="val 13793"/>
             </a:avLst>
           </a:prstGeom>
           <a:solidFill>
-            <a:srgbClr val="EDEEF6"/>
+            <a:srgbClr val="5F5E5A"/>
           </a:solidFill>
           <a:ln/>
           <a:effectLst>
@@ -5000,7 +5000,7 @@
         <p:spPr>
           <a:xfrm>
             <a:off x="548640" y="1234440"/>
-            <a:ext cx="2103120" cy="457200"/>
+            <a:ext cx="1371600" cy="530352"/>
           </a:xfrm>
           <a:prstGeom prst="rect">
             <a:avLst/>
@@ -5013,20 +5013,43 @@
           <a:lstStyle/>
           <a:p>
             <a:pPr algn="ctr" indent="0" marL="0">
-              <a:buNone/>
-            </a:pPr>
-            <a:r>
-              <a:rPr lang="en-US" sz="1200" b="1" dirty="0">
-                <a:solidFill>
-                  <a:srgbClr val="1F2430"/>
+              <a:lnSpc>
+                <a:spcPct val="100000"/>
+              </a:lnSpc>
+              <a:buNone/>
+            </a:pPr>
+            <a:r>
+              <a:rPr lang="en-US" sz="1250" b="1" dirty="0">
+                <a:solidFill>
+                  <a:srgbClr val="FFFFFF"/>
                 </a:solidFill>
                 <a:latin typeface="Calibri" pitchFamily="34" charset="0"/>
                 <a:ea typeface="Calibri" pitchFamily="34" charset="-122"/>
                 <a:cs typeface="Calibri" pitchFamily="34" charset="-120"/>
               </a:rPr>
-              <a:t>Scanned exam  ·  /api/execute</a:t>
-            </a:r>
-            <a:endParaRPr lang="en-US" sz="1200" dirty="0"/>
+              <a:t>Scanned exam</a:t>
+            </a:r>
+            <a:endParaRPr lang="en-US" sz="1250" dirty="0"/>
+          </a:p>
+          <a:p>
+            <a:pPr algn="ctr" indent="0" marL="0">
+              <a:lnSpc>
+                <a:spcPct val="100000"/>
+              </a:lnSpc>
+              <a:buNone/>
+            </a:pPr>
+            <a:r>
+              <a:rPr lang="en-US" sz="900" dirty="0">
+                <a:solidFill>
+                  <a:srgbClr val="FFFFFF"/>
+                </a:solidFill>
+                <a:latin typeface="Calibri" pitchFamily="34" charset="0"/>
+                <a:ea typeface="Calibri" pitchFamily="34" charset="-122"/>
+                <a:cs typeface="Calibri" pitchFamily="34" charset="-120"/>
+              </a:rPr>
+              <a:t>all pages</a:t>
+            </a:r>
+            <a:endParaRPr lang="en-US" sz="1250" dirty="0"/>
           </a:p>
         </p:txBody>
       </p:sp>
@@ -5038,16 +5061,16 @@
         </p:nvSpPr>
         <p:spPr>
           <a:xfrm>
-            <a:off x="6492240" y="1234440"/>
-            <a:ext cx="2103120" cy="457200"/>
+            <a:off x="548640" y="2331720"/>
+            <a:ext cx="1371600" cy="713232"/>
           </a:xfrm>
           <a:prstGeom prst="roundRect">
             <a:avLst>
-              <a:gd name="adj" fmla="val 16000"/>
+              <a:gd name="adj" fmla="val 10256"/>
             </a:avLst>
           </a:prstGeom>
           <a:solidFill>
-            <a:srgbClr val="EDEEF6"/>
+            <a:srgbClr val="1D8F73"/>
           </a:solidFill>
           <a:ln/>
           <a:effectLst>
@@ -5067,8 +5090,8 @@
         </p:nvSpPr>
         <p:spPr>
           <a:xfrm>
-            <a:off x="6492240" y="1234440"/>
-            <a:ext cx="2103120" cy="457200"/>
+            <a:off x="548640" y="2331720"/>
+            <a:ext cx="1371600" cy="713232"/>
           </a:xfrm>
           <a:prstGeom prst="rect">
             <a:avLst/>
@@ -5081,20 +5104,43 @@
           <a:lstStyle/>
           <a:p>
             <a:pPr algn="ctr" indent="0" marL="0">
-              <a:buNone/>
-            </a:pPr>
-            <a:r>
-              <a:rPr lang="en-US" sz="1200" b="1" dirty="0">
-                <a:solidFill>
-                  <a:srgbClr val="1F2430"/>
+              <a:lnSpc>
+                <a:spcPct val="100000"/>
+              </a:lnSpc>
+              <a:buNone/>
+            </a:pPr>
+            <a:r>
+              <a:rPr lang="en-US" sz="1250" b="1" dirty="0">
+                <a:solidFill>
+                  <a:srgbClr val="FFFFFF"/>
                 </a:solidFill>
                 <a:latin typeface="Calibri" pitchFamily="34" charset="0"/>
                 <a:ea typeface="Calibri" pitchFamily="34" charset="-122"/>
                 <a:cs typeface="Calibri" pitchFamily="34" charset="-120"/>
               </a:rPr>
-              <a:t>Response  ·  steps[]</a:t>
-            </a:r>
-            <a:endParaRPr lang="en-US" sz="1200" dirty="0"/>
+              <a:t>Reader</a:t>
+            </a:r>
+            <a:endParaRPr lang="en-US" sz="1250" dirty="0"/>
+          </a:p>
+          <a:p>
+            <a:pPr algn="ctr" indent="0" marL="0">
+              <a:lnSpc>
+                <a:spcPct val="100000"/>
+              </a:lnSpc>
+              <a:buNone/>
+            </a:pPr>
+            <a:r>
+              <a:rPr lang="en-US" sz="900" dirty="0">
+                <a:solidFill>
+                  <a:srgbClr val="FFFFFF"/>
+                </a:solidFill>
+                <a:latin typeface="Calibri" pitchFamily="34" charset="0"/>
+                <a:ea typeface="Calibri" pitchFamily="34" charset="-122"/>
+                <a:cs typeface="Calibri" pitchFamily="34" charset="-120"/>
+              </a:rPr>
+              <a:t>OCR</a:t>
+            </a:r>
+            <a:endParaRPr lang="en-US" sz="1250" dirty="0"/>
           </a:p>
         </p:txBody>
       </p:sp>
@@ -5106,16 +5152,16 @@
         </p:nvSpPr>
         <p:spPr>
           <a:xfrm>
-            <a:off x="548640" y="1965960"/>
-            <a:ext cx="8046720" cy="658368"/>
+            <a:off x="2217420" y="2331720"/>
+            <a:ext cx="1371600" cy="713232"/>
           </a:xfrm>
           <a:prstGeom prst="roundRect">
             <a:avLst>
-              <a:gd name="adj" fmla="val 11111"/>
+              <a:gd name="adj" fmla="val 10256"/>
             </a:avLst>
           </a:prstGeom>
           <a:solidFill>
-            <a:srgbClr val="534AB7"/>
+            <a:srgbClr val="5F5E5A"/>
           </a:solidFill>
           <a:ln/>
           <a:effectLst>
@@ -5135,8 +5181,8 @@
         </p:nvSpPr>
         <p:spPr>
           <a:xfrm>
-            <a:off x="548640" y="1965960"/>
-            <a:ext cx="8046720" cy="658368"/>
+            <a:off x="2217420" y="2331720"/>
+            <a:ext cx="1371600" cy="713232"/>
           </a:xfrm>
           <a:prstGeom prst="rect">
             <a:avLst/>
@@ -5155,7 +5201,7 @@
               <a:buNone/>
             </a:pPr>
             <a:r>
-              <a:rPr lang="en-US" sz="1300" b="1" dirty="0">
+              <a:rPr lang="en-US" sz="1250" b="1" dirty="0">
                 <a:solidFill>
                   <a:srgbClr val="FFFFFF"/>
                 </a:solidFill>
@@ -5163,9 +5209,9 @@
                 <a:ea typeface="Calibri" pitchFamily="34" charset="-122"/>
                 <a:cs typeface="Calibri" pitchFamily="34" charset="-120"/>
               </a:rPr>
-              <a:t>Supervisor agent</a:t>
-            </a:r>
-            <a:endParaRPr lang="en-US" sz="1300" dirty="0"/>
+              <a:t>Retriever</a:t>
+            </a:r>
+            <a:endParaRPr lang="en-US" sz="1250" dirty="0"/>
           </a:p>
           <a:p>
             <a:pPr algn="ctr" indent="0" marL="0">
@@ -5175,7 +5221,7 @@
               <a:buNone/>
             </a:pPr>
             <a:r>
-              <a:rPr lang="en-US" sz="950" dirty="0">
+              <a:rPr lang="en-US" sz="900" dirty="0">
                 <a:solidFill>
                   <a:srgbClr val="FFFFFF"/>
                 </a:solidFill>
@@ -5183,9 +5229,9 @@
                 <a:ea typeface="Calibri" pitchFamily="34" charset="-122"/>
                 <a:cs typeface="Calibri" pitchFamily="34" charset="-120"/>
               </a:rPr>
-              <a:t>ReAct loop  ·  grades question by question  ·  stops when confident</a:t>
-            </a:r>
-            <a:endParaRPr lang="en-US" sz="1300" dirty="0"/>
+              <a:t>rubric match</a:t>
+            </a:r>
+            <a:endParaRPr lang="en-US" sz="1250" dirty="0"/>
           </a:p>
         </p:txBody>
       </p:sp>
@@ -5197,57 +5243,8 @@
         </p:nvSpPr>
         <p:spPr>
           <a:xfrm>
-            <a:off x="1600200" y="1691640"/>
-            <a:ext cx="0" cy="274320"/>
-          </a:xfrm>
-          <a:prstGeom prst="line">
-            <a:avLst/>
-          </a:prstGeom>
-          <a:noFill/>
-          <a:ln w="19050">
-            <a:solidFill>
-              <a:srgbClr val="8A93A8"/>
-            </a:solidFill>
-            <a:prstDash val="solid"/>
-            <a:headEnd type="none"/>
-            <a:tailEnd type="triangle"/>
-          </a:ln>
-        </p:spPr>
-      </p:sp>
-      <p:sp>
-        <p:nvSpPr>
-          <p:cNvPr id="10" name="Shape 8"/>
-          <p:cNvSpPr/>
-          <p:nvPr/>
-        </p:nvSpPr>
-        <p:spPr>
-          <a:xfrm>
-            <a:off x="7543800" y="1691640"/>
-            <a:ext cx="0" cy="274320"/>
-          </a:xfrm>
-          <a:prstGeom prst="line">
-            <a:avLst/>
-          </a:prstGeom>
-          <a:noFill/>
-          <a:ln w="19050">
-            <a:solidFill>
-              <a:srgbClr val="8A93A8"/>
-            </a:solidFill>
-            <a:prstDash val="solid"/>
-            <a:headEnd type="triangle"/>
-          </a:ln>
-        </p:spPr>
-      </p:sp>
-      <p:sp>
-        <p:nvSpPr>
-          <p:cNvPr id="11" name="Shape 9"/>
-          <p:cNvSpPr/>
-          <p:nvPr/>
-        </p:nvSpPr>
-        <p:spPr>
-          <a:xfrm>
-            <a:off x="548640" y="3017520"/>
-            <a:ext cx="1463040" cy="713232"/>
+            <a:off x="3886200" y="2331720"/>
+            <a:ext cx="1371600" cy="713232"/>
           </a:xfrm>
           <a:prstGeom prst="roundRect">
             <a:avLst>
@@ -5269,14 +5266,14 @@
       </p:sp>
       <p:sp>
         <p:nvSpPr>
-          <p:cNvPr id="12" name="Text 10"/>
-          <p:cNvSpPr/>
-          <p:nvPr/>
-        </p:nvSpPr>
-        <p:spPr>
-          <a:xfrm>
-            <a:off x="548640" y="3017520"/>
-            <a:ext cx="1463040" cy="713232"/>
+          <p:cNvPr id="10" name="Text 8"/>
+          <p:cNvSpPr/>
+          <p:nvPr/>
+        </p:nvSpPr>
+        <p:spPr>
+          <a:xfrm>
+            <a:off x="3886200" y="2331720"/>
+            <a:ext cx="1371600" cy="713232"/>
           </a:xfrm>
           <a:prstGeom prst="rect">
             <a:avLst/>
@@ -5295,7 +5292,7 @@
               <a:buNone/>
             </a:pPr>
             <a:r>
-              <a:rPr lang="en-US" sz="1300" b="1" dirty="0">
+              <a:rPr lang="en-US" sz="1250" b="1" dirty="0">
                 <a:solidFill>
                   <a:srgbClr val="FFFFFF"/>
                 </a:solidFill>
@@ -5303,9 +5300,9 @@
                 <a:ea typeface="Calibri" pitchFamily="34" charset="-122"/>
                 <a:cs typeface="Calibri" pitchFamily="34" charset="-120"/>
               </a:rPr>
-              <a:t>Transcriber</a:t>
-            </a:r>
-            <a:endParaRPr lang="en-US" sz="1300" dirty="0"/>
+              <a:t>Grader</a:t>
+            </a:r>
+            <a:endParaRPr lang="en-US" sz="1250" dirty="0"/>
           </a:p>
           <a:p>
             <a:pPr algn="ctr" indent="0" marL="0">
@@ -5315,7 +5312,7 @@
               <a:buNone/>
             </a:pPr>
             <a:r>
-              <a:rPr lang="en-US" sz="950" dirty="0">
+              <a:rPr lang="en-US" sz="900" dirty="0">
                 <a:solidFill>
                   <a:srgbClr val="FFFFFF"/>
                 </a:solidFill>
@@ -5323,22 +5320,22 @@
                 <a:ea typeface="Calibri" pitchFamily="34" charset="-122"/>
                 <a:cs typeface="Calibri" pitchFamily="34" charset="-120"/>
               </a:rPr>
-              <a:t>reads + splits</a:t>
-            </a:r>
-            <a:endParaRPr lang="en-US" sz="1300" dirty="0"/>
-          </a:p>
-        </p:txBody>
-      </p:sp>
-      <p:sp>
-        <p:nvSpPr>
-          <p:cNvPr id="13" name="Shape 11"/>
-          <p:cNvSpPr/>
-          <p:nvPr/>
-        </p:nvSpPr>
-        <p:spPr>
-          <a:xfrm>
-            <a:off x="2194560" y="3017520"/>
-            <a:ext cx="1463040" cy="713232"/>
+              <a:t>score + feedback</a:t>
+            </a:r>
+            <a:endParaRPr lang="en-US" sz="1250" dirty="0"/>
+          </a:p>
+        </p:txBody>
+      </p:sp>
+      <p:sp>
+        <p:nvSpPr>
+          <p:cNvPr id="11" name="Shape 9"/>
+          <p:cNvSpPr/>
+          <p:nvPr/>
+        </p:nvSpPr>
+        <p:spPr>
+          <a:xfrm>
+            <a:off x="5554980" y="2331720"/>
+            <a:ext cx="1371600" cy="713232"/>
           </a:xfrm>
           <a:prstGeom prst="roundRect">
             <a:avLst>
@@ -5346,7 +5343,7 @@
             </a:avLst>
           </a:prstGeom>
           <a:solidFill>
-            <a:srgbClr val="5F5E5A"/>
+            <a:srgbClr val="1D8F73"/>
           </a:solidFill>
           <a:ln/>
           <a:effectLst>
@@ -5360,14 +5357,14 @@
       </p:sp>
       <p:sp>
         <p:nvSpPr>
-          <p:cNvPr id="14" name="Text 12"/>
-          <p:cNvSpPr/>
-          <p:nvPr/>
-        </p:nvSpPr>
-        <p:spPr>
-          <a:xfrm>
-            <a:off x="2194560" y="3017520"/>
-            <a:ext cx="1463040" cy="713232"/>
+          <p:cNvPr id="12" name="Text 10"/>
+          <p:cNvSpPr/>
+          <p:nvPr/>
+        </p:nvSpPr>
+        <p:spPr>
+          <a:xfrm>
+            <a:off x="5554980" y="2331720"/>
+            <a:ext cx="1371600" cy="713232"/>
           </a:xfrm>
           <a:prstGeom prst="rect">
             <a:avLst/>
@@ -5386,7 +5383,7 @@
               <a:buNone/>
             </a:pPr>
             <a:r>
-              <a:rPr lang="en-US" sz="1300" b="1" dirty="0">
+              <a:rPr lang="en-US" sz="1250" b="1" dirty="0">
                 <a:solidFill>
                   <a:srgbClr val="FFFFFF"/>
                 </a:solidFill>
@@ -5394,9 +5391,9 @@
                 <a:ea typeface="Calibri" pitchFamily="34" charset="-122"/>
                 <a:cs typeface="Calibri" pitchFamily="34" charset="-120"/>
               </a:rPr>
-              <a:t>Retriever</a:t>
-            </a:r>
-            <a:endParaRPr lang="en-US" sz="1300" dirty="0"/>
+              <a:t>Reflector</a:t>
+            </a:r>
+            <a:endParaRPr lang="en-US" sz="1250" dirty="0"/>
           </a:p>
           <a:p>
             <a:pPr algn="ctr" indent="0" marL="0">
@@ -5406,7 +5403,7 @@
               <a:buNone/>
             </a:pPr>
             <a:r>
-              <a:rPr lang="en-US" sz="950" dirty="0">
+              <a:rPr lang="en-US" sz="900" dirty="0">
                 <a:solidFill>
                   <a:srgbClr val="FFFFFF"/>
                 </a:solidFill>
@@ -5414,22 +5411,22 @@
                 <a:ea typeface="Calibri" pitchFamily="34" charset="-122"/>
                 <a:cs typeface="Calibri" pitchFamily="34" charset="-120"/>
               </a:rPr>
-              <a:t>RAG</a:t>
-            </a:r>
-            <a:endParaRPr lang="en-US" sz="1300" dirty="0"/>
-          </a:p>
-        </p:txBody>
-      </p:sp>
-      <p:sp>
-        <p:nvSpPr>
-          <p:cNvPr id="15" name="Shape 13"/>
-          <p:cNvSpPr/>
-          <p:nvPr/>
-        </p:nvSpPr>
-        <p:spPr>
-          <a:xfrm>
-            <a:off x="3840480" y="3017520"/>
-            <a:ext cx="1463040" cy="713232"/>
+              <a:t>reflection check</a:t>
+            </a:r>
+            <a:endParaRPr lang="en-US" sz="1250" dirty="0"/>
+          </a:p>
+        </p:txBody>
+      </p:sp>
+      <p:sp>
+        <p:nvSpPr>
+          <p:cNvPr id="13" name="Shape 11"/>
+          <p:cNvSpPr/>
+          <p:nvPr/>
+        </p:nvSpPr>
+        <p:spPr>
+          <a:xfrm>
+            <a:off x="7223760" y="2331720"/>
+            <a:ext cx="1371600" cy="713232"/>
           </a:xfrm>
           <a:prstGeom prst="roundRect">
             <a:avLst>
@@ -5451,14 +5448,14 @@
       </p:sp>
       <p:sp>
         <p:nvSpPr>
-          <p:cNvPr id="16" name="Text 14"/>
-          <p:cNvSpPr/>
-          <p:nvPr/>
-        </p:nvSpPr>
-        <p:spPr>
-          <a:xfrm>
-            <a:off x="3840480" y="3017520"/>
-            <a:ext cx="1463040" cy="713232"/>
+          <p:cNvPr id="14" name="Text 12"/>
+          <p:cNvSpPr/>
+          <p:nvPr/>
+        </p:nvSpPr>
+        <p:spPr>
+          <a:xfrm>
+            <a:off x="7223760" y="2331720"/>
+            <a:ext cx="1371600" cy="713232"/>
           </a:xfrm>
           <a:prstGeom prst="rect">
             <a:avLst/>
@@ -5477,7 +5474,7 @@
               <a:buNone/>
             </a:pPr>
             <a:r>
-              <a:rPr lang="en-US" sz="1300" b="1" dirty="0">
+              <a:rPr lang="en-US" sz="1250" b="1" dirty="0">
                 <a:solidFill>
                   <a:srgbClr val="FFFFFF"/>
                 </a:solidFill>
@@ -5485,9 +5482,9 @@
                 <a:ea typeface="Calibri" pitchFamily="34" charset="-122"/>
                 <a:cs typeface="Calibri" pitchFamily="34" charset="-120"/>
               </a:rPr>
-              <a:t>Verifier</a:t>
-            </a:r>
-            <a:endParaRPr lang="en-US" sz="1300" dirty="0"/>
+              <a:t>Result</a:t>
+            </a:r>
+            <a:endParaRPr lang="en-US" sz="1250" dirty="0"/>
           </a:p>
           <a:p>
             <a:pPr algn="ctr" indent="0" marL="0">
@@ -5497,7 +5494,7 @@
               <a:buNone/>
             </a:pPr>
             <a:r>
-              <a:rPr lang="en-US" sz="950" dirty="0">
+              <a:rPr lang="en-US" sz="900" dirty="0">
                 <a:solidFill>
                   <a:srgbClr val="FFFFFF"/>
                 </a:solidFill>
@@ -5505,9 +5502,73 @@
                 <a:ea typeface="Calibri" pitchFamily="34" charset="-122"/>
                 <a:cs typeface="Calibri" pitchFamily="34" charset="-120"/>
               </a:rPr>
-              <a:t>SymPy · no LLM</a:t>
-            </a:r>
-            <a:endParaRPr lang="en-US" sz="1300" dirty="0"/>
+              <a:t>grade + trace</a:t>
+            </a:r>
+            <a:endParaRPr lang="en-US" sz="1250" dirty="0"/>
+          </a:p>
+        </p:txBody>
+      </p:sp>
+      <p:sp>
+        <p:nvSpPr>
+          <p:cNvPr id="15" name="Shape 13"/>
+          <p:cNvSpPr/>
+          <p:nvPr/>
+        </p:nvSpPr>
+        <p:spPr>
+          <a:xfrm>
+            <a:off x="493776" y="2167128"/>
+            <a:ext cx="402336" cy="402336"/>
+          </a:xfrm>
+          <a:prstGeom prst="ellipse">
+            <a:avLst/>
+          </a:prstGeom>
+          <a:solidFill>
+            <a:srgbClr val="534AB7"/>
+          </a:solidFill>
+          <a:ln w="15875">
+            <a:solidFill>
+              <a:srgbClr val="FFFFFF"/>
+            </a:solidFill>
+            <a:prstDash val="solid"/>
+          </a:ln>
+        </p:spPr>
+      </p:sp>
+      <p:sp>
+        <p:nvSpPr>
+          <p:cNvPr id="16" name="Text 14"/>
+          <p:cNvSpPr/>
+          <p:nvPr/>
+        </p:nvSpPr>
+        <p:spPr>
+          <a:xfrm>
+            <a:off x="493776" y="2167128"/>
+            <a:ext cx="402336" cy="402336"/>
+          </a:xfrm>
+          <a:prstGeom prst="rect">
+            <a:avLst/>
+          </a:prstGeom>
+          <a:noFill/>
+          <a:ln/>
+        </p:spPr>
+        <p:txBody>
+          <a:bodyPr wrap="square" lIns="0" tIns="0" rIns="0" bIns="0" rtlCol="0" anchor="ctr"/>
+          <a:lstStyle/>
+          <a:p>
+            <a:pPr algn="ctr" indent="0" marL="0">
+              <a:buNone/>
+            </a:pPr>
+            <a:r>
+              <a:rPr lang="en-US" sz="800" b="1" dirty="0">
+                <a:solidFill>
+                  <a:srgbClr val="FFFFFF"/>
+                </a:solidFill>
+                <a:latin typeface="Calibri" pitchFamily="34" charset="0"/>
+                <a:ea typeface="Calibri" pitchFamily="34" charset="-122"/>
+                <a:cs typeface="Calibri" pitchFamily="34" charset="-120"/>
+              </a:rPr>
+              <a:t>LLM</a:t>
+            </a:r>
+            <a:endParaRPr lang="en-US" sz="800" dirty="0"/>
           </a:p>
         </p:txBody>
       </p:sp>
@@ -5519,16 +5580,265 @@
         </p:nvSpPr>
         <p:spPr>
           <a:xfrm>
-            <a:off x="5486400" y="3017520"/>
-            <a:ext cx="1463040" cy="713232"/>
+            <a:off x="3831336" y="2167128"/>
+            <a:ext cx="402336" cy="402336"/>
+          </a:xfrm>
+          <a:prstGeom prst="ellipse">
+            <a:avLst/>
+          </a:prstGeom>
+          <a:solidFill>
+            <a:srgbClr val="534AB7"/>
+          </a:solidFill>
+          <a:ln w="15875">
+            <a:solidFill>
+              <a:srgbClr val="FFFFFF"/>
+            </a:solidFill>
+            <a:prstDash val="solid"/>
+          </a:ln>
+        </p:spPr>
+      </p:sp>
+      <p:sp>
+        <p:nvSpPr>
+          <p:cNvPr id="18" name="Text 16"/>
+          <p:cNvSpPr/>
+          <p:nvPr/>
+        </p:nvSpPr>
+        <p:spPr>
+          <a:xfrm>
+            <a:off x="3831336" y="2167128"/>
+            <a:ext cx="402336" cy="402336"/>
+          </a:xfrm>
+          <a:prstGeom prst="rect">
+            <a:avLst/>
+          </a:prstGeom>
+          <a:noFill/>
+          <a:ln/>
+        </p:spPr>
+        <p:txBody>
+          <a:bodyPr wrap="square" lIns="0" tIns="0" rIns="0" bIns="0" rtlCol="0" anchor="ctr"/>
+          <a:lstStyle/>
+          <a:p>
+            <a:pPr algn="ctr" indent="0" marL="0">
+              <a:buNone/>
+            </a:pPr>
+            <a:r>
+              <a:rPr lang="en-US" sz="800" b="1" dirty="0">
+                <a:solidFill>
+                  <a:srgbClr val="FFFFFF"/>
+                </a:solidFill>
+                <a:latin typeface="Calibri" pitchFamily="34" charset="0"/>
+                <a:ea typeface="Calibri" pitchFamily="34" charset="-122"/>
+                <a:cs typeface="Calibri" pitchFamily="34" charset="-120"/>
+              </a:rPr>
+              <a:t>LLM</a:t>
+            </a:r>
+            <a:endParaRPr lang="en-US" sz="800" dirty="0"/>
+          </a:p>
+        </p:txBody>
+      </p:sp>
+      <p:sp>
+        <p:nvSpPr>
+          <p:cNvPr id="19" name="Shape 17"/>
+          <p:cNvSpPr/>
+          <p:nvPr/>
+        </p:nvSpPr>
+        <p:spPr>
+          <a:xfrm>
+            <a:off x="5500116" y="2167128"/>
+            <a:ext cx="402336" cy="402336"/>
+          </a:xfrm>
+          <a:prstGeom prst="ellipse">
+            <a:avLst/>
+          </a:prstGeom>
+          <a:solidFill>
+            <a:srgbClr val="534AB7"/>
+          </a:solidFill>
+          <a:ln w="15875">
+            <a:solidFill>
+              <a:srgbClr val="FFFFFF"/>
+            </a:solidFill>
+            <a:prstDash val="solid"/>
+          </a:ln>
+        </p:spPr>
+      </p:sp>
+      <p:sp>
+        <p:nvSpPr>
+          <p:cNvPr id="20" name="Text 18"/>
+          <p:cNvSpPr/>
+          <p:nvPr/>
+        </p:nvSpPr>
+        <p:spPr>
+          <a:xfrm>
+            <a:off x="5500116" y="2167128"/>
+            <a:ext cx="402336" cy="402336"/>
+          </a:xfrm>
+          <a:prstGeom prst="rect">
+            <a:avLst/>
+          </a:prstGeom>
+          <a:noFill/>
+          <a:ln/>
+        </p:spPr>
+        <p:txBody>
+          <a:bodyPr wrap="square" lIns="0" tIns="0" rIns="0" bIns="0" rtlCol="0" anchor="ctr"/>
+          <a:lstStyle/>
+          <a:p>
+            <a:pPr algn="ctr" indent="0" marL="0">
+              <a:buNone/>
+            </a:pPr>
+            <a:r>
+              <a:rPr lang="en-US" sz="800" b="1" dirty="0">
+                <a:solidFill>
+                  <a:srgbClr val="FFFFFF"/>
+                </a:solidFill>
+                <a:latin typeface="Calibri" pitchFamily="34" charset="0"/>
+                <a:ea typeface="Calibri" pitchFamily="34" charset="-122"/>
+                <a:cs typeface="Calibri" pitchFamily="34" charset="-120"/>
+              </a:rPr>
+              <a:t>LLM</a:t>
+            </a:r>
+            <a:endParaRPr lang="en-US" sz="800" dirty="0"/>
+          </a:p>
+        </p:txBody>
+      </p:sp>
+      <p:sp>
+        <p:nvSpPr>
+          <p:cNvPr id="21" name="Shape 19"/>
+          <p:cNvSpPr/>
+          <p:nvPr/>
+        </p:nvSpPr>
+        <p:spPr>
+          <a:xfrm>
+            <a:off x="1920240" y="2688336"/>
+            <a:ext cx="297180" cy="0"/>
+          </a:xfrm>
+          <a:prstGeom prst="line">
+            <a:avLst/>
+          </a:prstGeom>
+          <a:noFill/>
+          <a:ln w="19050">
+            <a:solidFill>
+              <a:srgbClr val="8A93A8"/>
+            </a:solidFill>
+            <a:prstDash val="solid"/>
+            <a:tailEnd type="triangle"/>
+          </a:ln>
+        </p:spPr>
+      </p:sp>
+      <p:sp>
+        <p:nvSpPr>
+          <p:cNvPr id="22" name="Shape 20"/>
+          <p:cNvSpPr/>
+          <p:nvPr/>
+        </p:nvSpPr>
+        <p:spPr>
+          <a:xfrm>
+            <a:off x="3589020" y="2688336"/>
+            <a:ext cx="297180" cy="0"/>
+          </a:xfrm>
+          <a:prstGeom prst="line">
+            <a:avLst/>
+          </a:prstGeom>
+          <a:noFill/>
+          <a:ln w="19050">
+            <a:solidFill>
+              <a:srgbClr val="8A93A8"/>
+            </a:solidFill>
+            <a:prstDash val="solid"/>
+            <a:tailEnd type="triangle"/>
+          </a:ln>
+        </p:spPr>
+      </p:sp>
+      <p:sp>
+        <p:nvSpPr>
+          <p:cNvPr id="23" name="Shape 21"/>
+          <p:cNvSpPr/>
+          <p:nvPr/>
+        </p:nvSpPr>
+        <p:spPr>
+          <a:xfrm>
+            <a:off x="5257800" y="2688336"/>
+            <a:ext cx="297180" cy="0"/>
+          </a:xfrm>
+          <a:prstGeom prst="line">
+            <a:avLst/>
+          </a:prstGeom>
+          <a:noFill/>
+          <a:ln w="19050">
+            <a:solidFill>
+              <a:srgbClr val="534AB7"/>
+            </a:solidFill>
+            <a:prstDash val="solid"/>
+            <a:headEnd type="triangle"/>
+            <a:tailEnd type="triangle"/>
+          </a:ln>
+        </p:spPr>
+      </p:sp>
+      <p:sp>
+        <p:nvSpPr>
+          <p:cNvPr id="24" name="Shape 22"/>
+          <p:cNvSpPr/>
+          <p:nvPr/>
+        </p:nvSpPr>
+        <p:spPr>
+          <a:xfrm>
+            <a:off x="6926580" y="2688336"/>
+            <a:ext cx="297180" cy="0"/>
+          </a:xfrm>
+          <a:prstGeom prst="line">
+            <a:avLst/>
+          </a:prstGeom>
+          <a:noFill/>
+          <a:ln w="19050">
+            <a:solidFill>
+              <a:srgbClr val="8A93A8"/>
+            </a:solidFill>
+            <a:prstDash val="solid"/>
+            <a:tailEnd type="triangle"/>
+          </a:ln>
+        </p:spPr>
+      </p:sp>
+      <p:sp>
+        <p:nvSpPr>
+          <p:cNvPr id="25" name="Shape 23"/>
+          <p:cNvSpPr/>
+          <p:nvPr/>
+        </p:nvSpPr>
+        <p:spPr>
+          <a:xfrm>
+            <a:off x="1234440" y="1764792"/>
+            <a:ext cx="0" cy="566928"/>
+          </a:xfrm>
+          <a:prstGeom prst="line">
+            <a:avLst/>
+          </a:prstGeom>
+          <a:noFill/>
+          <a:ln w="19050">
+            <a:solidFill>
+              <a:srgbClr val="8A93A8"/>
+            </a:solidFill>
+            <a:prstDash val="solid"/>
+            <a:tailEnd type="triangle"/>
+          </a:ln>
+        </p:spPr>
+      </p:sp>
+      <p:sp>
+        <p:nvSpPr>
+          <p:cNvPr id="26" name="Shape 24"/>
+          <p:cNvSpPr/>
+          <p:nvPr/>
+        </p:nvSpPr>
+        <p:spPr>
+          <a:xfrm>
+            <a:off x="2011680" y="3977640"/>
+            <a:ext cx="1828800" cy="548640"/>
           </a:xfrm>
           <a:prstGeom prst="roundRect">
             <a:avLst>
-              <a:gd name="adj" fmla="val 10256"/>
+              <a:gd name="adj" fmla="val 13333"/>
             </a:avLst>
           </a:prstGeom>
           <a:solidFill>
-            <a:srgbClr val="1D8F73"/>
+            <a:srgbClr val="6B6A63"/>
           </a:solidFill>
           <a:ln/>
           <a:effectLst>
@@ -5542,14 +5852,14 @@
       </p:sp>
       <p:sp>
         <p:nvSpPr>
-          <p:cNvPr id="18" name="Text 16"/>
-          <p:cNvSpPr/>
-          <p:nvPr/>
-        </p:nvSpPr>
-        <p:spPr>
-          <a:xfrm>
-            <a:off x="5486400" y="3017520"/>
-            <a:ext cx="1463040" cy="713232"/>
+          <p:cNvPr id="27" name="Text 25"/>
+          <p:cNvSpPr/>
+          <p:nvPr/>
+        </p:nvSpPr>
+        <p:spPr>
+          <a:xfrm>
+            <a:off x="2011680" y="3977640"/>
+            <a:ext cx="1828800" cy="548640"/>
           </a:xfrm>
           <a:prstGeom prst="rect">
             <a:avLst/>
@@ -5568,7 +5878,7 @@
               <a:buNone/>
             </a:pPr>
             <a:r>
-              <a:rPr lang="en-US" sz="1300" b="1" dirty="0">
+              <a:rPr lang="en-US" sz="1250" b="1" dirty="0">
                 <a:solidFill>
                   <a:srgbClr val="FFFFFF"/>
                 </a:solidFill>
@@ -5576,9 +5886,9 @@
                 <a:ea typeface="Calibri" pitchFamily="34" charset="-122"/>
                 <a:cs typeface="Calibri" pitchFamily="34" charset="-120"/>
               </a:rPr>
-              <a:t>Grader</a:t>
-            </a:r>
-            <a:endParaRPr lang="en-US" sz="1300" dirty="0"/>
+              <a:t>Knowledge base</a:t>
+            </a:r>
+            <a:endParaRPr lang="en-US" sz="1250" dirty="0"/>
           </a:p>
           <a:p>
             <a:pPr algn="ctr" indent="0" marL="0">
@@ -5588,7 +5898,7 @@
               <a:buNone/>
             </a:pPr>
             <a:r>
-              <a:rPr lang="en-US" sz="950" dirty="0">
+              <a:rPr lang="en-US" sz="900" dirty="0">
                 <a:solidFill>
                   <a:srgbClr val="FFFFFF"/>
                 </a:solidFill>
@@ -5596,30 +5906,157 @@
                 <a:ea typeface="Calibri" pitchFamily="34" charset="-122"/>
                 <a:cs typeface="Calibri" pitchFamily="34" charset="-120"/>
               </a:rPr>
-              <a:t>few-shot</a:t>
-            </a:r>
-            <a:endParaRPr lang="en-US" sz="1300" dirty="0"/>
-          </a:p>
-        </p:txBody>
-      </p:sp>
-      <p:sp>
-        <p:nvSpPr>
-          <p:cNvPr id="19" name="Shape 17"/>
-          <p:cNvSpPr/>
-          <p:nvPr/>
-        </p:nvSpPr>
-        <p:spPr>
-          <a:xfrm>
-            <a:off x="7132320" y="3017520"/>
-            <a:ext cx="1463040" cy="713232"/>
+              <a:t>solutions · rubric</a:t>
+            </a:r>
+            <a:endParaRPr lang="en-US" sz="1250" dirty="0"/>
+          </a:p>
+        </p:txBody>
+      </p:sp>
+      <p:sp>
+        <p:nvSpPr>
+          <p:cNvPr id="28" name="Shape 26"/>
+          <p:cNvSpPr/>
+          <p:nvPr/>
+        </p:nvSpPr>
+        <p:spPr>
+          <a:xfrm>
+            <a:off x="2903220" y="3044952"/>
+            <a:ext cx="0" cy="932688"/>
+          </a:xfrm>
+          <a:prstGeom prst="line">
+            <a:avLst/>
+          </a:prstGeom>
+          <a:noFill/>
+          <a:ln w="19050">
+            <a:solidFill>
+              <a:srgbClr val="8A93A8"/>
+            </a:solidFill>
+            <a:prstDash val="solid"/>
+            <a:headEnd type="triangle"/>
+            <a:tailEnd type="none"/>
+          </a:ln>
+        </p:spPr>
+      </p:sp>
+      <p:sp>
+        <p:nvSpPr>
+          <p:cNvPr id="29" name="Text 27"/>
+          <p:cNvSpPr/>
+          <p:nvPr/>
+        </p:nvSpPr>
+        <p:spPr>
+          <a:xfrm>
+            <a:off x="4014720" y="3140000"/>
+            <a:ext cx="1980000" cy="260000"/>
+          </a:xfrm>
+          <a:prstGeom prst="rect">
+            <a:avLst/>
+          </a:prstGeom>
+          <a:noFill/>
+          <a:ln/>
+        </p:spPr>
+        <p:txBody>
+          <a:bodyPr wrap="square" lIns="0" tIns="0" rIns="0" bIns="0" rtlCol="0" anchor="ctr"/>
+          <a:lstStyle/>
+          <a:p>
+            <a:pPr algn="ctr" indent="0" marL="0">
+              <a:buNone/>
+            </a:pPr>
+            <a:r>
+              <a:rPr lang="en-US" sz="1050" i="1" b="1" dirty="0">
+                <a:solidFill>
+                  <a:srgbClr val="534AB7"/>
+                </a:solidFill>
+                <a:latin typeface="Calibri" pitchFamily="34" charset="0"/>
+                <a:ea typeface="Calibri" pitchFamily="34" charset="-122"/>
+                <a:cs typeface="Calibri" pitchFamily="34" charset="-120"/>
+              </a:rPr>
+              <a:t>grade ↔ reflect  ·  revise ≤ 1</a:t>
+            </a:r>
+            <a:endParaRPr lang="en-US" sz="1050" dirty="0"/>
+          </a:p>
+        </p:txBody>
+      </p:sp>
+      <p:sp>
+        <p:nvSpPr>
+          <p:cNvPr id="30" name="Text 28"/>
+          <p:cNvSpPr/>
+          <p:nvPr/>
+        </p:nvSpPr>
+        <p:spPr>
+          <a:xfrm>
+            <a:off x="548640" y="4617720"/>
+            <a:ext cx="8046720" cy="320040"/>
+          </a:xfrm>
+          <a:prstGeom prst="rect">
+            <a:avLst/>
+          </a:prstGeom>
+          <a:noFill/>
+          <a:ln/>
+        </p:spPr>
+        <p:txBody>
+          <a:bodyPr wrap="square" lIns="0" tIns="0" rIns="0" bIns="0" rtlCol="0" anchor="ctr"/>
+          <a:lstStyle/>
+          <a:p>
+            <a:pPr indent="0" marL="0">
+              <a:buNone/>
+            </a:pPr>
+            <a:r>
+              <a:rPr lang="en-US" sz="1050" i="1" dirty="0">
+                <a:solidFill>
+                  <a:srgbClr val="64708A"/>
+                </a:solidFill>
+                <a:latin typeface="Calibri" pitchFamily="34" charset="0"/>
+                <a:ea typeface="Calibri" pitchFamily="34" charset="-122"/>
+                <a:cs typeface="Calibri" pitchFamily="34" charset="-120"/>
+              </a:rPr>
+              <a:t>Reflection loop  ·  questions graded in parallel  ·  every LLM call on gpt-5.4-mini</a:t>
+            </a:r>
+            <a:endParaRPr lang="en-US" sz="1050" dirty="0"/>
+          </a:p>
+        </p:txBody>
+      </p:sp>
+      <p:sp>
+        <p:nvSpPr>
+          <p:cNvPr id="33" name="Shape 31"/>
+          <p:cNvSpPr/>
+          <p:nvPr/>
+        </p:nvSpPr>
+        <p:spPr>
+          <a:xfrm>
+            <a:off x="6240780" y="3080000"/>
+            <a:ext cx="0" cy="440000"/>
+          </a:xfrm>
+          <a:prstGeom prst="line">
+            <a:avLst/>
+          </a:prstGeom>
+          <a:noFill/>
+          <a:ln w="19050">
+            <a:solidFill>
+              <a:srgbClr val="8A93A8"/>
+            </a:solidFill>
+            <a:prstDash val="dash"/>
+            <a:tailEnd type="triangle"/>
+          </a:ln>
+        </p:spPr>
+      </p:sp>
+      <p:sp>
+        <p:nvSpPr>
+          <p:cNvPr id="31" name="Shape 29"/>
+          <p:cNvSpPr/>
+          <p:nvPr/>
+        </p:nvSpPr>
+        <p:spPr>
+          <a:xfrm>
+            <a:off x="5554980" y="3560000"/>
+            <a:ext cx="1371600" cy="548640"/>
           </a:xfrm>
           <a:prstGeom prst="roundRect">
             <a:avLst>
-              <a:gd name="adj" fmla="val 10256"/>
+              <a:gd name="adj" fmla="val 13333"/>
             </a:avLst>
           </a:prstGeom>
           <a:solidFill>
-            <a:srgbClr val="1D8F73"/>
+            <a:srgbClr val="D85A30"/>
           </a:solidFill>
           <a:ln/>
           <a:effectLst>
@@ -5633,14 +6070,14 @@
       </p:sp>
       <p:sp>
         <p:nvSpPr>
-          <p:cNvPr id="20" name="Text 18"/>
-          <p:cNvSpPr/>
-          <p:nvPr/>
-        </p:nvSpPr>
-        <p:spPr>
-          <a:xfrm>
-            <a:off x="7132320" y="3017520"/>
-            <a:ext cx="1463040" cy="713232"/>
+          <p:cNvPr id="32" name="Text 30"/>
+          <p:cNvSpPr/>
+          <p:nvPr/>
+        </p:nvSpPr>
+        <p:spPr>
+          <a:xfrm>
+            <a:off x="5554980" y="3560000"/>
+            <a:ext cx="1371600" cy="548640"/>
           </a:xfrm>
           <a:prstGeom prst="rect">
             <a:avLst/>
@@ -5659,7 +6096,7 @@
               <a:buNone/>
             </a:pPr>
             <a:r>
-              <a:rPr lang="en-US" sz="1300" b="1" dirty="0">
+              <a:rPr lang="en-US" sz="1250" b="1" dirty="0">
                 <a:solidFill>
                   <a:srgbClr val="FFFFFF"/>
                 </a:solidFill>
@@ -5667,9 +6104,9 @@
                 <a:ea typeface="Calibri" pitchFamily="34" charset="-122"/>
                 <a:cs typeface="Calibri" pitchFamily="34" charset="-120"/>
               </a:rPr>
-              <a:t>Reflector</a:t>
-            </a:r>
-            <a:endParaRPr lang="en-US" sz="1300" dirty="0"/>
+              <a:t>Refuse / flag</a:t>
+            </a:r>
+            <a:endParaRPr lang="en-US" sz="1250" dirty="0"/>
           </a:p>
           <a:p>
             <a:pPr algn="ctr" indent="0" marL="0">
@@ -5679,7 +6116,7 @@
               <a:buNone/>
             </a:pPr>
             <a:r>
-              <a:rPr lang="en-US" sz="950" dirty="0">
+              <a:rPr lang="en-US" sz="900" dirty="0">
                 <a:solidFill>
                   <a:srgbClr val="FFFFFF"/>
                 </a:solidFill>
@@ -5687,466 +6124,9 @@
                 <a:ea typeface="Calibri" pitchFamily="34" charset="-122"/>
                 <a:cs typeface="Calibri" pitchFamily="34" charset="-120"/>
               </a:rPr>
-              <a:t>critique</a:t>
-            </a:r>
-            <a:endParaRPr lang="en-US" sz="1300" dirty="0"/>
-          </a:p>
-        </p:txBody>
-      </p:sp>
-      <p:sp>
-        <p:nvSpPr>
-          <p:cNvPr id="21" name="Shape 19"/>
-          <p:cNvSpPr/>
-          <p:nvPr/>
-        </p:nvSpPr>
-        <p:spPr>
-          <a:xfrm>
-            <a:off x="1280160" y="2624328"/>
-            <a:ext cx="0" cy="393192"/>
-          </a:xfrm>
-          <a:prstGeom prst="line">
-            <a:avLst/>
-          </a:prstGeom>
-          <a:noFill/>
-          <a:ln w="19050">
-            <a:solidFill>
-              <a:srgbClr val="8A93A8"/>
-            </a:solidFill>
-            <a:prstDash val="solid"/>
-            <a:headEnd type="triangle"/>
-            <a:tailEnd type="triangle"/>
-          </a:ln>
-        </p:spPr>
-      </p:sp>
-      <p:sp>
-        <p:nvSpPr>
-          <p:cNvPr id="22" name="Shape 20"/>
-          <p:cNvSpPr/>
-          <p:nvPr/>
-        </p:nvSpPr>
-        <p:spPr>
-          <a:xfrm>
-            <a:off x="2926080" y="2624328"/>
-            <a:ext cx="0" cy="393192"/>
-          </a:xfrm>
-          <a:prstGeom prst="line">
-            <a:avLst/>
-          </a:prstGeom>
-          <a:noFill/>
-          <a:ln w="19050">
-            <a:solidFill>
-              <a:srgbClr val="8A93A8"/>
-            </a:solidFill>
-            <a:prstDash val="solid"/>
-            <a:headEnd type="triangle"/>
-            <a:tailEnd type="triangle"/>
-          </a:ln>
-        </p:spPr>
-      </p:sp>
-      <p:sp>
-        <p:nvSpPr>
-          <p:cNvPr id="23" name="Shape 21"/>
-          <p:cNvSpPr/>
-          <p:nvPr/>
-        </p:nvSpPr>
-        <p:spPr>
-          <a:xfrm>
-            <a:off x="4572000" y="2624328"/>
-            <a:ext cx="0" cy="393192"/>
-          </a:xfrm>
-          <a:prstGeom prst="line">
-            <a:avLst/>
-          </a:prstGeom>
-          <a:noFill/>
-          <a:ln w="19050">
-            <a:solidFill>
-              <a:srgbClr val="8A93A8"/>
-            </a:solidFill>
-            <a:prstDash val="solid"/>
-            <a:headEnd type="triangle"/>
-            <a:tailEnd type="triangle"/>
-          </a:ln>
-        </p:spPr>
-      </p:sp>
-      <p:sp>
-        <p:nvSpPr>
-          <p:cNvPr id="24" name="Shape 22"/>
-          <p:cNvSpPr/>
-          <p:nvPr/>
-        </p:nvSpPr>
-        <p:spPr>
-          <a:xfrm>
-            <a:off x="6217920" y="2624328"/>
-            <a:ext cx="0" cy="393192"/>
-          </a:xfrm>
-          <a:prstGeom prst="line">
-            <a:avLst/>
-          </a:prstGeom>
-          <a:noFill/>
-          <a:ln w="19050">
-            <a:solidFill>
-              <a:srgbClr val="8A93A8"/>
-            </a:solidFill>
-            <a:prstDash val="solid"/>
-            <a:headEnd type="triangle"/>
-            <a:tailEnd type="triangle"/>
-          </a:ln>
-        </p:spPr>
-      </p:sp>
-      <p:sp>
-        <p:nvSpPr>
-          <p:cNvPr id="25" name="Shape 23"/>
-          <p:cNvSpPr/>
-          <p:nvPr/>
-        </p:nvSpPr>
-        <p:spPr>
-          <a:xfrm>
-            <a:off x="7863840" y="2624328"/>
-            <a:ext cx="0" cy="393192"/>
-          </a:xfrm>
-          <a:prstGeom prst="line">
-            <a:avLst/>
-          </a:prstGeom>
-          <a:noFill/>
-          <a:ln w="19050">
-            <a:solidFill>
-              <a:srgbClr val="8A93A8"/>
-            </a:solidFill>
-            <a:prstDash val="solid"/>
-            <a:headEnd type="triangle"/>
-            <a:tailEnd type="triangle"/>
-          </a:ln>
-        </p:spPr>
-      </p:sp>
-      <p:sp>
-        <p:nvSpPr>
-          <p:cNvPr id="26" name="Shape 24"/>
-          <p:cNvSpPr/>
-          <p:nvPr/>
-        </p:nvSpPr>
-        <p:spPr>
-          <a:xfrm>
-            <a:off x="1828800" y="3977640"/>
-            <a:ext cx="2377440" cy="566928"/>
-          </a:xfrm>
-          <a:prstGeom prst="roundRect">
-            <a:avLst>
-              <a:gd name="adj" fmla="val 12903"/>
-            </a:avLst>
-          </a:prstGeom>
-          <a:solidFill>
-            <a:srgbClr val="6B6A63"/>
-          </a:solidFill>
-          <a:ln/>
-          <a:effectLst>
-            <a:outerShdw sx="100000" sy="100000" kx="0" ky="0" algn="bl" rotWithShape="0" blurRad="88900" dist="38100" dir="5400000">
-              <a:srgbClr val="000000">
-                <a:alpha val="16000"/>
-              </a:srgbClr>
-            </a:outerShdw>
-          </a:effectLst>
-        </p:spPr>
-      </p:sp>
-      <p:sp>
-        <p:nvSpPr>
-          <p:cNvPr id="27" name="Text 25"/>
-          <p:cNvSpPr/>
-          <p:nvPr/>
-        </p:nvSpPr>
-        <p:spPr>
-          <a:xfrm>
-            <a:off x="1828800" y="3977640"/>
-            <a:ext cx="2377440" cy="566928"/>
-          </a:xfrm>
-          <a:prstGeom prst="rect">
-            <a:avLst/>
-          </a:prstGeom>
-          <a:noFill/>
-          <a:ln/>
-        </p:spPr>
-        <p:txBody>
-          <a:bodyPr wrap="square" lIns="0" tIns="0" rIns="0" bIns="0" rtlCol="0" anchor="ctr"/>
-          <a:lstStyle/>
-          <a:p>
-            <a:pPr algn="ctr" indent="0" marL="0">
-              <a:lnSpc>
-                <a:spcPct val="100000"/>
-              </a:lnSpc>
-              <a:buNone/>
-            </a:pPr>
-            <a:r>
-              <a:rPr lang="en-US" sz="1300" b="1" dirty="0">
-                <a:solidFill>
-                  <a:srgbClr val="FFFFFF"/>
-                </a:solidFill>
-                <a:latin typeface="Calibri" pitchFamily="34" charset="0"/>
-                <a:ea typeface="Calibri" pitchFamily="34" charset="-122"/>
-                <a:cs typeface="Calibri" pitchFamily="34" charset="-120"/>
-              </a:rPr>
-              <a:t>Knowledge base</a:t>
-            </a:r>
-            <a:endParaRPr lang="en-US" sz="1300" dirty="0"/>
-          </a:p>
-          <a:p>
-            <a:pPr algn="ctr" indent="0" marL="0">
-              <a:lnSpc>
-                <a:spcPct val="100000"/>
-              </a:lnSpc>
-              <a:buNone/>
-            </a:pPr>
-            <a:r>
-              <a:rPr lang="en-US" sz="950" dirty="0">
-                <a:solidFill>
-                  <a:srgbClr val="FFFFFF"/>
-                </a:solidFill>
-                <a:latin typeface="Calibri" pitchFamily="34" charset="0"/>
-                <a:ea typeface="Calibri" pitchFamily="34" charset="-122"/>
-                <a:cs typeface="Calibri" pitchFamily="34" charset="-120"/>
-              </a:rPr>
-              <a:t>solutions · rubrics · examples</a:t>
-            </a:r>
-            <a:endParaRPr lang="en-US" sz="1300" dirty="0"/>
-          </a:p>
-        </p:txBody>
-      </p:sp>
-      <p:sp>
-        <p:nvSpPr>
-          <p:cNvPr id="28" name="Shape 26"/>
-          <p:cNvSpPr/>
-          <p:nvPr/>
-        </p:nvSpPr>
-        <p:spPr>
-          <a:xfrm>
-            <a:off x="2926080" y="3730752"/>
-            <a:ext cx="0" cy="246888"/>
-          </a:xfrm>
-          <a:prstGeom prst="line">
-            <a:avLst/>
-          </a:prstGeom>
-          <a:noFill/>
-          <a:ln w="19050">
-            <a:solidFill>
-              <a:srgbClr val="8A93A8"/>
-            </a:solidFill>
-            <a:prstDash val="solid"/>
-            <a:headEnd type="triangle"/>
-            <a:tailEnd type="triangle"/>
-          </a:ln>
-        </p:spPr>
-      </p:sp>
-      <p:sp>
-        <p:nvSpPr>
-          <p:cNvPr id="29" name="Shape 27"/>
-          <p:cNvSpPr/>
-          <p:nvPr/>
-        </p:nvSpPr>
-        <p:spPr>
-          <a:xfrm>
-            <a:off x="4709160" y="4160520"/>
-            <a:ext cx="146304" cy="146304"/>
-          </a:xfrm>
-          <a:prstGeom prst="ellipse">
-            <a:avLst/>
-          </a:prstGeom>
-          <a:solidFill>
-            <a:srgbClr val="534AB7"/>
-          </a:solidFill>
-          <a:ln/>
-        </p:spPr>
-      </p:sp>
-      <p:sp>
-        <p:nvSpPr>
-          <p:cNvPr id="30" name="Text 28"/>
-          <p:cNvSpPr/>
-          <p:nvPr/>
-        </p:nvSpPr>
-        <p:spPr>
-          <a:xfrm>
-            <a:off x="4910328" y="4087368"/>
-            <a:ext cx="1188720" cy="292608"/>
-          </a:xfrm>
-          <a:prstGeom prst="rect">
-            <a:avLst/>
-          </a:prstGeom>
-          <a:noFill/>
-          <a:ln/>
-        </p:spPr>
-        <p:txBody>
-          <a:bodyPr wrap="square" lIns="0" tIns="0" rIns="0" bIns="0" rtlCol="0" anchor="ctr"/>
-          <a:lstStyle/>
-          <a:p>
-            <a:pPr indent="0" marL="0">
-              <a:buNone/>
-            </a:pPr>
-            <a:r>
-              <a:rPr lang="en-US" sz="1000" dirty="0">
-                <a:solidFill>
-                  <a:srgbClr val="64708A"/>
-                </a:solidFill>
-                <a:latin typeface="Calibri" pitchFamily="34" charset="0"/>
-                <a:ea typeface="Calibri" pitchFamily="34" charset="-122"/>
-                <a:cs typeface="Calibri" pitchFamily="34" charset="-120"/>
-              </a:rPr>
-              <a:t>Orchestrator</a:t>
-            </a:r>
-            <a:endParaRPr lang="en-US" sz="1000" dirty="0"/>
-          </a:p>
-        </p:txBody>
-      </p:sp>
-      <p:sp>
-        <p:nvSpPr>
-          <p:cNvPr id="31" name="Shape 29"/>
-          <p:cNvSpPr/>
-          <p:nvPr/>
-        </p:nvSpPr>
-        <p:spPr>
-          <a:xfrm>
-            <a:off x="5943600" y="4160520"/>
-            <a:ext cx="146304" cy="146304"/>
-          </a:xfrm>
-          <a:prstGeom prst="ellipse">
-            <a:avLst/>
-          </a:prstGeom>
-          <a:solidFill>
-            <a:srgbClr val="1D8F73"/>
-          </a:solidFill>
-          <a:ln/>
-        </p:spPr>
-      </p:sp>
-      <p:sp>
-        <p:nvSpPr>
-          <p:cNvPr id="32" name="Text 30"/>
-          <p:cNvSpPr/>
-          <p:nvPr/>
-        </p:nvSpPr>
-        <p:spPr>
-          <a:xfrm>
-            <a:off x="6144768" y="4087368"/>
-            <a:ext cx="1188720" cy="292608"/>
-          </a:xfrm>
-          <a:prstGeom prst="rect">
-            <a:avLst/>
-          </a:prstGeom>
-          <a:noFill/>
-          <a:ln/>
-        </p:spPr>
-        <p:txBody>
-          <a:bodyPr wrap="square" lIns="0" tIns="0" rIns="0" bIns="0" rtlCol="0" anchor="ctr"/>
-          <a:lstStyle/>
-          <a:p>
-            <a:pPr indent="0" marL="0">
-              <a:buNone/>
-            </a:pPr>
-            <a:r>
-              <a:rPr lang="en-US" sz="1000" dirty="0">
-                <a:solidFill>
-                  <a:srgbClr val="64708A"/>
-                </a:solidFill>
-                <a:latin typeface="Calibri" pitchFamily="34" charset="0"/>
-                <a:ea typeface="Calibri" pitchFamily="34" charset="-122"/>
-                <a:cs typeface="Calibri" pitchFamily="34" charset="-120"/>
-              </a:rPr>
-              <a:t>LLM call</a:t>
-            </a:r>
-            <a:endParaRPr lang="en-US" sz="1000" dirty="0"/>
-          </a:p>
-        </p:txBody>
-      </p:sp>
-      <p:sp>
-        <p:nvSpPr>
-          <p:cNvPr id="33" name="Shape 31"/>
-          <p:cNvSpPr/>
-          <p:nvPr/>
-        </p:nvSpPr>
-        <p:spPr>
-          <a:xfrm>
-            <a:off x="7178040" y="4160520"/>
-            <a:ext cx="146304" cy="146304"/>
-          </a:xfrm>
-          <a:prstGeom prst="ellipse">
-            <a:avLst/>
-          </a:prstGeom>
-          <a:solidFill>
-            <a:srgbClr val="5F5E5A"/>
-          </a:solidFill>
-          <a:ln/>
-        </p:spPr>
-      </p:sp>
-      <p:sp>
-        <p:nvSpPr>
-          <p:cNvPr id="34" name="Text 32"/>
-          <p:cNvSpPr/>
-          <p:nvPr/>
-        </p:nvSpPr>
-        <p:spPr>
-          <a:xfrm>
-            <a:off x="7379208" y="4087368"/>
-            <a:ext cx="1188720" cy="292608"/>
-          </a:xfrm>
-          <a:prstGeom prst="rect">
-            <a:avLst/>
-          </a:prstGeom>
-          <a:noFill/>
-          <a:ln/>
-        </p:spPr>
-        <p:txBody>
-          <a:bodyPr wrap="square" lIns="0" tIns="0" rIns="0" bIns="0" rtlCol="0" anchor="ctr"/>
-          <a:lstStyle/>
-          <a:p>
-            <a:pPr indent="0" marL="0">
-              <a:buNone/>
-            </a:pPr>
-            <a:r>
-              <a:rPr lang="en-US" sz="1000" dirty="0">
-                <a:solidFill>
-                  <a:srgbClr val="64708A"/>
-                </a:solidFill>
-                <a:latin typeface="Calibri" pitchFamily="34" charset="0"/>
-                <a:ea typeface="Calibri" pitchFamily="34" charset="-122"/>
-                <a:cs typeface="Calibri" pitchFamily="34" charset="-120"/>
-              </a:rPr>
-              <a:t>Data / tool</a:t>
-            </a:r>
-            <a:endParaRPr lang="en-US" sz="1000" dirty="0"/>
-          </a:p>
-        </p:txBody>
-      </p:sp>
-      <p:sp>
-        <p:nvSpPr>
-          <p:cNvPr id="35" name="Text 33"/>
-          <p:cNvSpPr/>
-          <p:nvPr/>
-        </p:nvSpPr>
-        <p:spPr>
-          <a:xfrm>
-            <a:off x="548640" y="4590288"/>
-            <a:ext cx="4023360" cy="320040"/>
-          </a:xfrm>
-          <a:prstGeom prst="rect">
-            <a:avLst/>
-          </a:prstGeom>
-          <a:noFill/>
-          <a:ln/>
-        </p:spPr>
-        <p:txBody>
-          <a:bodyPr wrap="square" lIns="0" tIns="0" rIns="0" bIns="0" rtlCol="0" anchor="ctr"/>
-          <a:lstStyle/>
-          <a:p>
-            <a:pPr indent="0" marL="0">
-              <a:buNone/>
-            </a:pPr>
-            <a:r>
-              <a:rPr lang="en-US" sz="1050" i="1" dirty="0">
-                <a:solidFill>
-                  <a:srgbClr val="64708A"/>
-                </a:solidFill>
-                <a:latin typeface="Calibri" pitchFamily="34" charset="0"/>
-                <a:ea typeface="Calibri" pitchFamily="34" charset="-122"/>
-                <a:cs typeface="Calibri" pitchFamily="34" charset="-120"/>
-              </a:rPr>
-              <a:t>Every LLM call runs on GPT-4o-mini.</a:t>
-            </a:r>
-            <a:endParaRPr lang="en-US" sz="1050" dirty="0"/>
+              <a:t>ungradeable input</a:t>
+            </a:r>
+            <a:endParaRPr lang="en-US" sz="900" dirty="0"/>
           </a:p>
         </p:txBody>
       </p:sp>
@@ -6161,6 +6141,780 @@
 <file path=ppt/slides/slide7.xml><?xml version="1.0" encoding="utf-8"?>
 <p:sld xmlns:a="http://schemas.openxmlformats.org/drawingml/2006/main" xmlns:r="http://schemas.openxmlformats.org/officeDocument/2006/relationships" xmlns:p="http://schemas.openxmlformats.org/presentationml/2006/main">
   <p:cSld name="Slide 7">
+    <p:bg>
+      <p:bgPr>
+        <a:solidFill>
+          <a:srgbClr val="F3F4FB"/>
+        </a:solidFill>
+      </p:bgPr>
+    </p:bg>
+    <p:spTree>
+      <p:nvGrpSpPr>
+        <p:cNvPr id="1" name=""/>
+        <p:cNvGrpSpPr/>
+        <p:nvPr/>
+      </p:nvGrpSpPr>
+      <p:grpSpPr>
+        <a:xfrm>
+          <a:off x="0" y="0"/>
+          <a:ext cx="0" cy="0"/>
+          <a:chOff x="0" y="0"/>
+          <a:chExt cx="0" cy="0"/>
+        </a:xfrm>
+      </p:grpSpPr>
+      <p:sp>
+        <p:nvSpPr>
+          <p:cNvPr id="2" name="Text 0"/>
+          <p:cNvSpPr/>
+          <p:nvPr/>
+        </p:nvSpPr>
+        <p:spPr>
+          <a:xfrm>
+            <a:off x="548640" y="384048"/>
+            <a:ext cx="8046720" cy="640080"/>
+          </a:xfrm>
+          <a:prstGeom prst="rect">
+            <a:avLst/>
+          </a:prstGeom>
+          <a:noFill/>
+          <a:ln/>
+        </p:spPr>
+        <p:txBody>
+          <a:bodyPr wrap="square" lIns="0" tIns="0" rIns="0" bIns="0" rtlCol="0" anchor="ctr"/>
+          <a:lstStyle/>
+          <a:p>
+            <a:pPr algn="l" indent="0" marL="0">
+              <a:buNone/>
+            </a:pPr>
+            <a:r>
+              <a:rPr lang="en-US" sz="3000" b="1" dirty="0">
+                <a:solidFill>
+                  <a:srgbClr val="1F2430"/>
+                </a:solidFill>
+                <a:latin typeface="Cambria" pitchFamily="34" charset="0"/>
+                <a:ea typeface="Cambria" pitchFamily="34" charset="-122"/>
+                <a:cs typeface="Cambria" pitchFamily="34" charset="-120"/>
+              </a:rPr>
+              <a:t>CheckMate grades, then checks itself</a:t>
+            </a:r>
+            <a:endParaRPr lang="en-US" sz="3000" dirty="0"/>
+          </a:p>
+        </p:txBody>
+      </p:sp>
+      <p:sp>
+        <p:nvSpPr>
+          <p:cNvPr id="3" name="Text 1"/>
+          <p:cNvSpPr/>
+          <p:nvPr/>
+        </p:nvSpPr>
+        <p:spPr>
+          <a:xfrm>
+            <a:off x="548640" y="1024128"/>
+            <a:ext cx="8046720" cy="457200"/>
+          </a:xfrm>
+          <a:prstGeom prst="rect">
+            <a:avLst/>
+          </a:prstGeom>
+          <a:noFill/>
+          <a:ln/>
+        </p:spPr>
+        <p:txBody>
+          <a:bodyPr wrap="square" lIns="0" tIns="0" rIns="0" bIns="0" rtlCol="0" anchor="ctr"/>
+          <a:lstStyle/>
+          <a:p>
+            <a:pPr indent="0" marL="0">
+              <a:lnSpc>
+                <a:spcPct val="105000"/>
+              </a:lnSpc>
+              <a:buNone/>
+            </a:pPr>
+            <a:r>
+              <a:rPr lang="en-US" sz="1300" i="1" dirty="0">
+                <a:solidFill>
+                  <a:srgbClr val="64708A"/>
+                </a:solidFill>
+                <a:latin typeface="Calibri" pitchFamily="34" charset="0"/>
+                <a:ea typeface="Calibri" pitchFamily="34" charset="-122"/>
+                <a:cs typeface="Calibri" pitchFamily="34" charset="-120"/>
+              </a:rPr>
+              <a:t>Runs only when confidence is low, the rubric match is unclear, score and feedback disagree, or the OCR text is unclear.</a:t>
+            </a:r>
+            <a:endParaRPr lang="en-US" sz="1300" dirty="0"/>
+          </a:p>
+        </p:txBody>
+      </p:sp>
+      <p:sp>
+        <p:nvSpPr>
+          <p:cNvPr id="4" name="Shape 2"/>
+          <p:cNvSpPr/>
+          <p:nvPr/>
+        </p:nvSpPr>
+        <p:spPr>
+          <a:xfrm>
+            <a:off x="2834640" y="1691640"/>
+            <a:ext cx="3474720" cy="731520"/>
+          </a:xfrm>
+          <a:prstGeom prst="roundRect">
+            <a:avLst>
+              <a:gd name="adj" fmla="val 10000"/>
+            </a:avLst>
+          </a:prstGeom>
+          <a:solidFill>
+            <a:srgbClr val="534AB7"/>
+          </a:solidFill>
+          <a:ln/>
+          <a:effectLst>
+            <a:outerShdw sx="100000" sy="100000" kx="0" ky="0" algn="bl" rotWithShape="0" blurRad="88900" dist="38100" dir="5400000">
+              <a:srgbClr val="000000">
+                <a:alpha val="16000"/>
+              </a:srgbClr>
+            </a:outerShdw>
+          </a:effectLst>
+        </p:spPr>
+      </p:sp>
+      <p:sp>
+        <p:nvSpPr>
+          <p:cNvPr id="5" name="Text 3"/>
+          <p:cNvSpPr/>
+          <p:nvPr/>
+        </p:nvSpPr>
+        <p:spPr>
+          <a:xfrm>
+            <a:off x="2834640" y="1691640"/>
+            <a:ext cx="3474720" cy="731520"/>
+          </a:xfrm>
+          <a:prstGeom prst="rect">
+            <a:avLst/>
+          </a:prstGeom>
+          <a:noFill/>
+          <a:ln/>
+        </p:spPr>
+        <p:txBody>
+          <a:bodyPr wrap="square" lIns="0" tIns="0" rIns="0" bIns="0" rtlCol="0" anchor="ctr"/>
+          <a:lstStyle/>
+          <a:p>
+            <a:pPr algn="ctr" indent="0" marL="0">
+              <a:lnSpc>
+                <a:spcPct val="100000"/>
+              </a:lnSpc>
+              <a:buNone/>
+            </a:pPr>
+            <a:r>
+              <a:rPr lang="en-US" sz="1500" b="1" dirty="0">
+                <a:solidFill>
+                  <a:srgbClr val="FFFFFF"/>
+                </a:solidFill>
+                <a:latin typeface="Calibri" pitchFamily="34" charset="0"/>
+                <a:ea typeface="Calibri" pitchFamily="34" charset="-122"/>
+                <a:cs typeface="Calibri" pitchFamily="34" charset="-120"/>
+              </a:rPr>
+              <a:t>Reflection check</a:t>
+            </a:r>
+            <a:endParaRPr lang="en-US" sz="1500" dirty="0"/>
+          </a:p>
+          <a:p>
+            <a:pPr algn="ctr" indent="0" marL="0">
+              <a:lnSpc>
+                <a:spcPct val="100000"/>
+              </a:lnSpc>
+              <a:buNone/>
+            </a:pPr>
+            <a:r>
+              <a:rPr lang="en-US" sz="1050" dirty="0">
+                <a:solidFill>
+                  <a:srgbClr val="CADCFC"/>
+                </a:solidFill>
+                <a:latin typeface="Calibri" pitchFamily="34" charset="0"/>
+                <a:ea typeface="Calibri" pitchFamily="34" charset="-122"/>
+                <a:cs typeface="Calibri" pitchFamily="34" charset="-120"/>
+              </a:rPr>
+              <a:t>chooses exactly one action</a:t>
+            </a:r>
+            <a:endParaRPr lang="en-US" sz="1500" dirty="0"/>
+          </a:p>
+        </p:txBody>
+      </p:sp>
+      <p:sp>
+        <p:nvSpPr>
+          <p:cNvPr id="6" name="Shape 4"/>
+          <p:cNvSpPr/>
+          <p:nvPr/>
+        </p:nvSpPr>
+        <p:spPr>
+          <a:xfrm>
+            <a:off x="548640" y="2926080"/>
+            <a:ext cx="1828800" cy="868680"/>
+          </a:xfrm>
+          <a:prstGeom prst="roundRect">
+            <a:avLst>
+              <a:gd name="adj" fmla="val 8421"/>
+            </a:avLst>
+          </a:prstGeom>
+          <a:solidFill>
+            <a:srgbClr val="1D8F73"/>
+          </a:solidFill>
+          <a:ln/>
+          <a:effectLst>
+            <a:outerShdw sx="100000" sy="100000" kx="0" ky="0" algn="bl" rotWithShape="0" blurRad="88900" dist="38100" dir="5400000">
+              <a:srgbClr val="000000">
+                <a:alpha val="16000"/>
+              </a:srgbClr>
+            </a:outerShdw>
+          </a:effectLst>
+        </p:spPr>
+      </p:sp>
+      <p:sp>
+        <p:nvSpPr>
+          <p:cNvPr id="7" name="Text 5"/>
+          <p:cNvSpPr/>
+          <p:nvPr/>
+        </p:nvSpPr>
+        <p:spPr>
+          <a:xfrm>
+            <a:off x="548640" y="2926080"/>
+            <a:ext cx="1828800" cy="868680"/>
+          </a:xfrm>
+          <a:prstGeom prst="rect">
+            <a:avLst/>
+          </a:prstGeom>
+          <a:noFill/>
+          <a:ln/>
+        </p:spPr>
+        <p:txBody>
+          <a:bodyPr wrap="square" lIns="0" tIns="0" rIns="0" bIns="0" rtlCol="0" anchor="ctr"/>
+          <a:lstStyle/>
+          <a:p>
+            <a:pPr algn="ctr" indent="0" marL="0">
+              <a:lnSpc>
+                <a:spcPct val="102000"/>
+              </a:lnSpc>
+              <a:buNone/>
+            </a:pPr>
+            <a:r>
+              <a:rPr lang="en-US" sz="1250" b="1" dirty="0">
+                <a:solidFill>
+                  <a:srgbClr val="FFFFFF"/>
+                </a:solidFill>
+                <a:latin typeface="Calibri" pitchFamily="34" charset="0"/>
+                <a:ea typeface="Calibri" pitchFamily="34" charset="-122"/>
+                <a:cs typeface="Calibri" pitchFamily="34" charset="-120"/>
+              </a:rPr>
+              <a:t>APPROVE</a:t>
+            </a:r>
+            <a:endParaRPr lang="en-US" sz="1250" dirty="0"/>
+          </a:p>
+          <a:p>
+            <a:pPr algn="ctr" indent="0" marL="0">
+              <a:lnSpc>
+                <a:spcPct val="102000"/>
+              </a:lnSpc>
+              <a:buNone/>
+            </a:pPr>
+            <a:r>
+              <a:rPr lang="en-US" sz="1050" dirty="0">
+                <a:solidFill>
+                  <a:srgbClr val="FFFFFF"/>
+                </a:solidFill>
+                <a:latin typeface="Calibri" pitchFamily="34" charset="0"/>
+                <a:ea typeface="Calibri" pitchFamily="34" charset="-122"/>
+                <a:cs typeface="Calibri" pitchFamily="34" charset="-120"/>
+              </a:rPr>
+              <a:t>accept the result</a:t>
+            </a:r>
+            <a:endParaRPr lang="en-US" sz="1250" dirty="0"/>
+          </a:p>
+        </p:txBody>
+      </p:sp>
+      <p:sp>
+        <p:nvSpPr>
+          <p:cNvPr id="8" name="Shape 6"/>
+          <p:cNvSpPr/>
+          <p:nvPr/>
+        </p:nvSpPr>
+        <p:spPr>
+          <a:xfrm>
+            <a:off x="2621585" y="2926080"/>
+            <a:ext cx="1828800" cy="868680"/>
+          </a:xfrm>
+          <a:prstGeom prst="roundRect">
+            <a:avLst>
+              <a:gd name="adj" fmla="val 8421"/>
+            </a:avLst>
+          </a:prstGeom>
+          <a:solidFill>
+            <a:srgbClr val="BA7517"/>
+          </a:solidFill>
+          <a:ln/>
+          <a:effectLst>
+            <a:outerShdw sx="100000" sy="100000" kx="0" ky="0" algn="bl" rotWithShape="0" blurRad="88900" dist="38100" dir="5400000">
+              <a:srgbClr val="000000">
+                <a:alpha val="16000"/>
+              </a:srgbClr>
+            </a:outerShdw>
+          </a:effectLst>
+        </p:spPr>
+      </p:sp>
+      <p:sp>
+        <p:nvSpPr>
+          <p:cNvPr id="9" name="Text 7"/>
+          <p:cNvSpPr/>
+          <p:nvPr/>
+        </p:nvSpPr>
+        <p:spPr>
+          <a:xfrm>
+            <a:off x="2621585" y="2926080"/>
+            <a:ext cx="1828800" cy="868680"/>
+          </a:xfrm>
+          <a:prstGeom prst="rect">
+            <a:avLst/>
+          </a:prstGeom>
+          <a:noFill/>
+          <a:ln/>
+        </p:spPr>
+        <p:txBody>
+          <a:bodyPr wrap="square" lIns="0" tIns="0" rIns="0" bIns="0" rtlCol="0" anchor="ctr"/>
+          <a:lstStyle/>
+          <a:p>
+            <a:pPr algn="ctr" indent="0" marL="0">
+              <a:lnSpc>
+                <a:spcPct val="102000"/>
+              </a:lnSpc>
+              <a:buNone/>
+            </a:pPr>
+            <a:r>
+              <a:rPr lang="en-US" sz="1250" b="1" dirty="0">
+                <a:solidFill>
+                  <a:srgbClr val="FFFFFF"/>
+                </a:solidFill>
+                <a:latin typeface="Calibri" pitchFamily="34" charset="0"/>
+                <a:ea typeface="Calibri" pitchFamily="34" charset="-122"/>
+                <a:cs typeface="Calibri" pitchFamily="34" charset="-120"/>
+              </a:rPr>
+              <a:t>REVISE  ≤ 1</a:t>
+            </a:r>
+            <a:endParaRPr lang="en-US" sz="1250" dirty="0"/>
+          </a:p>
+          <a:p>
+            <a:pPr algn="ctr" indent="0" marL="0">
+              <a:lnSpc>
+                <a:spcPct val="102000"/>
+              </a:lnSpc>
+              <a:buNone/>
+            </a:pPr>
+            <a:r>
+              <a:rPr lang="en-US" sz="1050" dirty="0">
+                <a:solidFill>
+                  <a:srgbClr val="FFFFFF"/>
+                </a:solidFill>
+                <a:latin typeface="Calibri" pitchFamily="34" charset="0"/>
+                <a:ea typeface="Calibri" pitchFamily="34" charset="-122"/>
+                <a:cs typeface="Calibri" pitchFamily="34" charset="-120"/>
+              </a:rPr>
+              <a:t>re-grade once</a:t>
+            </a:r>
+            <a:endParaRPr lang="en-US" sz="1250" dirty="0"/>
+          </a:p>
+        </p:txBody>
+      </p:sp>
+      <p:sp>
+        <p:nvSpPr>
+          <p:cNvPr id="10" name="Shape 8"/>
+          <p:cNvSpPr/>
+          <p:nvPr/>
+        </p:nvSpPr>
+        <p:spPr>
+          <a:xfrm>
+            <a:off x="4693615" y="2926080"/>
+            <a:ext cx="1828800" cy="868680"/>
+          </a:xfrm>
+          <a:prstGeom prst="roundRect">
+            <a:avLst>
+              <a:gd name="adj" fmla="val 8421"/>
+            </a:avLst>
+          </a:prstGeom>
+          <a:solidFill>
+            <a:srgbClr val="BA7517"/>
+          </a:solidFill>
+          <a:ln/>
+          <a:effectLst>
+            <a:outerShdw sx="100000" sy="100000" kx="0" ky="0" algn="bl" rotWithShape="0" blurRad="88900" dist="38100" dir="5400000">
+              <a:srgbClr val="000000">
+                <a:alpha val="16000"/>
+              </a:srgbClr>
+            </a:outerShdw>
+          </a:effectLst>
+        </p:spPr>
+      </p:sp>
+      <p:sp>
+        <p:nvSpPr>
+          <p:cNvPr id="11" name="Text 9"/>
+          <p:cNvSpPr/>
+          <p:nvPr/>
+        </p:nvSpPr>
+        <p:spPr>
+          <a:xfrm>
+            <a:off x="4693615" y="2926080"/>
+            <a:ext cx="1828800" cy="868680"/>
+          </a:xfrm>
+          <a:prstGeom prst="rect">
+            <a:avLst/>
+          </a:prstGeom>
+          <a:noFill/>
+          <a:ln/>
+        </p:spPr>
+        <p:txBody>
+          <a:bodyPr wrap="square" lIns="0" tIns="0" rIns="0" bIns="0" rtlCol="0" anchor="ctr"/>
+          <a:lstStyle/>
+          <a:p>
+            <a:pPr algn="ctr" indent="0" marL="0">
+              <a:lnSpc>
+                <a:spcPct val="102000"/>
+              </a:lnSpc>
+              <a:buNone/>
+            </a:pPr>
+            <a:r>
+              <a:rPr lang="en-US" sz="1250" b="1" dirty="0">
+                <a:solidFill>
+                  <a:srgbClr val="FFFFFF"/>
+                </a:solidFill>
+                <a:latin typeface="Calibri" pitchFamily="34" charset="0"/>
+                <a:ea typeface="Calibri" pitchFamily="34" charset="-122"/>
+                <a:cs typeface="Calibri" pitchFamily="34" charset="-120"/>
+              </a:rPr>
+              <a:t>RETRY_OCR  ≤ 1</a:t>
+            </a:r>
+            <a:endParaRPr lang="en-US" sz="1250" dirty="0"/>
+          </a:p>
+          <a:p>
+            <a:pPr algn="ctr" indent="0" marL="0">
+              <a:lnSpc>
+                <a:spcPct val="102000"/>
+              </a:lnSpc>
+              <a:buNone/>
+            </a:pPr>
+            <a:r>
+              <a:rPr lang="en-US" sz="1050" dirty="0">
+                <a:solidFill>
+                  <a:srgbClr val="FFFFFF"/>
+                </a:solidFill>
+                <a:latin typeface="Calibri" pitchFamily="34" charset="0"/>
+                <a:ea typeface="Calibri" pitchFamily="34" charset="-122"/>
+                <a:cs typeface="Calibri" pitchFamily="34" charset="-120"/>
+              </a:rPr>
+              <a:t>re-read once</a:t>
+            </a:r>
+            <a:endParaRPr lang="en-US" sz="1250" dirty="0"/>
+          </a:p>
+        </p:txBody>
+      </p:sp>
+      <p:sp>
+        <p:nvSpPr>
+          <p:cNvPr id="12" name="Shape 10"/>
+          <p:cNvSpPr/>
+          <p:nvPr/>
+        </p:nvSpPr>
+        <p:spPr>
+          <a:xfrm>
+            <a:off x="6766560" y="2926080"/>
+            <a:ext cx="1828800" cy="868680"/>
+          </a:xfrm>
+          <a:prstGeom prst="roundRect">
+            <a:avLst>
+              <a:gd name="adj" fmla="val 8421"/>
+            </a:avLst>
+          </a:prstGeom>
+          <a:solidFill>
+            <a:srgbClr val="D85A30"/>
+          </a:solidFill>
+          <a:ln/>
+          <a:effectLst>
+            <a:outerShdw sx="100000" sy="100000" kx="0" ky="0" algn="bl" rotWithShape="0" blurRad="88900" dist="38100" dir="5400000">
+              <a:srgbClr val="000000">
+                <a:alpha val="16000"/>
+              </a:srgbClr>
+            </a:outerShdw>
+          </a:effectLst>
+        </p:spPr>
+      </p:sp>
+      <p:sp>
+        <p:nvSpPr>
+          <p:cNvPr id="13" name="Text 11"/>
+          <p:cNvSpPr/>
+          <p:nvPr/>
+        </p:nvSpPr>
+        <p:spPr>
+          <a:xfrm>
+            <a:off x="6766560" y="2926080"/>
+            <a:ext cx="1828800" cy="868680"/>
+          </a:xfrm>
+          <a:prstGeom prst="rect">
+            <a:avLst/>
+          </a:prstGeom>
+          <a:noFill/>
+          <a:ln/>
+        </p:spPr>
+        <p:txBody>
+          <a:bodyPr wrap="square" lIns="0" tIns="0" rIns="0" bIns="0" rtlCol="0" anchor="ctr"/>
+          <a:lstStyle/>
+          <a:p>
+            <a:pPr algn="ctr" indent="0" marL="0">
+              <a:lnSpc>
+                <a:spcPct val="102000"/>
+              </a:lnSpc>
+              <a:buNone/>
+            </a:pPr>
+            <a:r>
+              <a:rPr lang="en-US" sz="1250" b="1" dirty="0">
+                <a:solidFill>
+                  <a:srgbClr val="FFFFFF"/>
+                </a:solidFill>
+                <a:latin typeface="Calibri" pitchFamily="34" charset="0"/>
+                <a:ea typeface="Calibri" pitchFamily="34" charset="-122"/>
+                <a:cs typeface="Calibri" pitchFamily="34" charset="-120"/>
+              </a:rPr>
+              <a:t>ESCALATE</a:t>
+            </a:r>
+            <a:endParaRPr lang="en-US" sz="1250" dirty="0"/>
+          </a:p>
+          <a:p>
+            <a:pPr algn="ctr" indent="0" marL="0">
+              <a:lnSpc>
+                <a:spcPct val="102000"/>
+              </a:lnSpc>
+              <a:buNone/>
+            </a:pPr>
+            <a:r>
+              <a:rPr lang="en-US" sz="1050" dirty="0">
+                <a:solidFill>
+                  <a:srgbClr val="FFFFFF"/>
+                </a:solidFill>
+                <a:latin typeface="Calibri" pitchFamily="34" charset="0"/>
+                <a:ea typeface="Calibri" pitchFamily="34" charset="-122"/>
+                <a:cs typeface="Calibri" pitchFamily="34" charset="-120"/>
+              </a:rPr>
+              <a:t>send to teacher</a:t>
+            </a:r>
+            <a:endParaRPr lang="en-US" sz="1250" dirty="0"/>
+          </a:p>
+        </p:txBody>
+      </p:sp>
+      <p:sp>
+        <p:nvSpPr>
+          <p:cNvPr id="14" name="Shape 12"/>
+          <p:cNvSpPr/>
+          <p:nvPr/>
+        </p:nvSpPr>
+        <p:spPr>
+          <a:xfrm>
+            <a:off x="4572000" y="2423160"/>
+            <a:ext cx="-3108960" cy="502920"/>
+          </a:xfrm>
+          <a:prstGeom prst="line">
+            <a:avLst/>
+          </a:prstGeom>
+          <a:noFill/>
+          <a:ln w="19050">
+            <a:solidFill>
+              <a:srgbClr val="8A93A8"/>
+            </a:solidFill>
+            <a:prstDash val="solid"/>
+            <a:tailEnd type="triangle"/>
+          </a:ln>
+        </p:spPr>
+      </p:sp>
+      <p:sp>
+        <p:nvSpPr>
+          <p:cNvPr id="15" name="Shape 13"/>
+          <p:cNvSpPr/>
+          <p:nvPr/>
+        </p:nvSpPr>
+        <p:spPr>
+          <a:xfrm>
+            <a:off x="4572000" y="2423160"/>
+            <a:ext cx="-1036015" cy="502920"/>
+          </a:xfrm>
+          <a:prstGeom prst="line">
+            <a:avLst/>
+          </a:prstGeom>
+          <a:noFill/>
+          <a:ln w="19050">
+            <a:solidFill>
+              <a:srgbClr val="8A93A8"/>
+            </a:solidFill>
+            <a:prstDash val="solid"/>
+            <a:tailEnd type="triangle"/>
+          </a:ln>
+        </p:spPr>
+      </p:sp>
+      <p:sp>
+        <p:nvSpPr>
+          <p:cNvPr id="16" name="Shape 14"/>
+          <p:cNvSpPr/>
+          <p:nvPr/>
+        </p:nvSpPr>
+        <p:spPr>
+          <a:xfrm>
+            <a:off x="4572000" y="2423160"/>
+            <a:ext cx="1036015" cy="502920"/>
+          </a:xfrm>
+          <a:prstGeom prst="line">
+            <a:avLst/>
+          </a:prstGeom>
+          <a:noFill/>
+          <a:ln w="19050">
+            <a:solidFill>
+              <a:srgbClr val="8A93A8"/>
+            </a:solidFill>
+            <a:prstDash val="solid"/>
+            <a:tailEnd type="triangle"/>
+          </a:ln>
+        </p:spPr>
+      </p:sp>
+      <p:sp>
+        <p:nvSpPr>
+          <p:cNvPr id="17" name="Shape 15"/>
+          <p:cNvSpPr/>
+          <p:nvPr/>
+        </p:nvSpPr>
+        <p:spPr>
+          <a:xfrm>
+            <a:off x="4572000" y="2423160"/>
+            <a:ext cx="3108960" cy="502920"/>
+          </a:xfrm>
+          <a:prstGeom prst="line">
+            <a:avLst/>
+          </a:prstGeom>
+          <a:noFill/>
+          <a:ln w="19050">
+            <a:solidFill>
+              <a:srgbClr val="8A93A8"/>
+            </a:solidFill>
+            <a:prstDash val="solid"/>
+            <a:tailEnd type="triangle"/>
+          </a:ln>
+        </p:spPr>
+      </p:sp>
+      <p:sp>
+        <p:nvSpPr>
+          <p:cNvPr id="18" name="Shape 16"/>
+          <p:cNvSpPr/>
+          <p:nvPr/>
+        </p:nvSpPr>
+        <p:spPr>
+          <a:xfrm>
+            <a:off x="822960" y="4069080"/>
+            <a:ext cx="7498080" cy="868680"/>
+          </a:xfrm>
+          <a:prstGeom prst="roundRect">
+            <a:avLst>
+              <a:gd name="adj" fmla="val 8421"/>
+            </a:avLst>
+          </a:prstGeom>
+          <a:solidFill>
+            <a:srgbClr val="FFFFFF"/>
+          </a:solidFill>
+          <a:ln w="12700">
+            <a:solidFill>
+              <a:srgbClr val="E4E6F2"/>
+            </a:solidFill>
+            <a:prstDash val="solid"/>
+          </a:ln>
+          <a:effectLst>
+            <a:outerShdw sx="100000" sy="100000" kx="0" ky="0" algn="bl" rotWithShape="0" blurRad="88900" dist="38100" dir="5400000">
+              <a:srgbClr val="000000">
+                <a:alpha val="16000"/>
+              </a:srgbClr>
+            </a:outerShdw>
+          </a:effectLst>
+        </p:spPr>
+      </p:sp>
+      <p:sp>
+        <p:nvSpPr>
+          <p:cNvPr id="19" name="Text 17"/>
+          <p:cNvSpPr/>
+          <p:nvPr/>
+        </p:nvSpPr>
+        <p:spPr>
+          <a:xfrm>
+            <a:off x="1051560" y="4069080"/>
+            <a:ext cx="7040880" cy="868680"/>
+          </a:xfrm>
+          <a:prstGeom prst="rect">
+            <a:avLst/>
+          </a:prstGeom>
+          <a:noFill/>
+          <a:ln/>
+        </p:spPr>
+        <p:txBody>
+          <a:bodyPr wrap="square" lIns="0" tIns="0" rIns="0" bIns="0" rtlCol="0" anchor="ctr"/>
+          <a:lstStyle/>
+          <a:p>
+            <a:pPr indent="0" marL="0">
+              <a:lnSpc>
+                <a:spcPct val="106000"/>
+              </a:lnSpc>
+              <a:buNone/>
+            </a:pPr>
+            <a:r>
+              <a:rPr lang="en-US" sz="1250" dirty="0">
+                <a:solidFill>
+                  <a:srgbClr val="1F2430"/>
+                </a:solidFill>
+                <a:latin typeface="Calibri" pitchFamily="34" charset="0"/>
+                <a:ea typeface="Calibri" pitchFamily="34" charset="-122"/>
+                <a:cs typeface="Calibri" pitchFamily="34" charset="-120"/>
+              </a:rPr>
+              <a:t>A reflection agent: it grades, then evaluates its own grade and decides whether to revise. </a:t>
+            </a:r>
+            <a:pPr indent="0" marL="0">
+              <a:lnSpc>
+                <a:spcPct val="106000"/>
+              </a:lnSpc>
+              <a:buNone/>
+            </a:pPr>
+            <a:r>
+              <a:rPr lang="en-US" sz="1250" b="1" dirty="0">
+                <a:solidFill>
+                  <a:srgbClr val="1F2430"/>
+                </a:solidFill>
+                <a:latin typeface="Calibri" pitchFamily="34" charset="0"/>
+                <a:ea typeface="Calibri" pitchFamily="34" charset="-122"/>
+                <a:cs typeface="Calibri" pitchFamily="34" charset="-120"/>
+              </a:rPr>
+              <a:t>It corrects itself at most once, and stops on its own when the grade is sound.</a:t>
+            </a:r>
+            <a:pPr indent="0" marL="0">
+              <a:lnSpc>
+                <a:spcPct val="106000"/>
+              </a:lnSpc>
+              <a:buNone/>
+            </a:pPr>
+            <a:r>
+              <a:rPr lang="en-US" sz="1250" dirty="0">
+                <a:solidFill>
+                  <a:srgbClr val="64708A"/>
+                </a:solidFill>
+                <a:latin typeface="Calibri" pitchFamily="34" charset="0"/>
+                <a:ea typeface="Calibri" pitchFamily="34" charset="-122"/>
+                <a:cs typeface="Calibri" pitchFamily="34" charset="-120"/>
+              </a:rPr>
+              <a:t>  Self-critique, self-correction, self-termination — escalating to the teacher only when it can't be sure.</a:t>
+            </a:r>
+            <a:endParaRPr lang="en-US" sz="1250" dirty="0"/>
+          </a:p>
+        </p:txBody>
+      </p:sp>
+    </p:spTree>
+  </p:cSld>
+  <p:clrMapOvr>
+    <a:masterClrMapping/>
+  </p:clrMapOvr>
+</p:sld>
+</file>
+
+<file path=ppt/slides/slide8.xml><?xml version="1.0" encoding="utf-8"?>
+<p:sld xmlns:a="http://schemas.openxmlformats.org/drawingml/2006/main" xmlns:r="http://schemas.openxmlformats.org/officeDocument/2006/relationships" xmlns:p="http://schemas.openxmlformats.org/presentationml/2006/main">
+  <p:cSld name="Slide 8">
     <p:bg>
       <p:bgPr>
         <a:solidFill>
@@ -6215,7 +6969,7 @@
                 <a:ea typeface="Cambria" pitchFamily="34" charset="-122"/>
                 <a:cs typeface="Cambria" pitchFamily="34" charset="-120"/>
               </a:rPr>
-              <a:t>The agents, combined</a:t>
+              <a:t>Why CheckMate's grades hold up</a:t>
             </a:r>
             <a:endParaRPr lang="en-US" sz="3000" dirty="0"/>
           </a:p>
@@ -6223,1448 +6977,18 @@
       </p:sp>
       <p:sp>
         <p:nvSpPr>
-          <p:cNvPr id="3" name="Text 1"/>
-          <p:cNvSpPr/>
-          <p:nvPr/>
-        </p:nvSpPr>
-        <p:spPr>
-          <a:xfrm>
-            <a:off x="548640" y="987552"/>
-            <a:ext cx="8046720" cy="320040"/>
-          </a:xfrm>
-          <a:prstGeom prst="rect">
-            <a:avLst/>
-          </a:prstGeom>
-          <a:noFill/>
-          <a:ln/>
-        </p:spPr>
-        <p:txBody>
-          <a:bodyPr wrap="square" lIns="0" tIns="0" rIns="0" bIns="0" rtlCol="0" anchor="ctr"/>
-          <a:lstStyle/>
-          <a:p>
-            <a:pPr indent="0" marL="0">
-              <a:buNone/>
-            </a:pPr>
-            <a:r>
-              <a:rPr lang="en-US" sz="1400" i="1" dirty="0">
-                <a:solidFill>
-                  <a:srgbClr val="64708A"/>
-                </a:solidFill>
-                <a:latin typeface="Calibri" pitchFamily="34" charset="0"/>
-                <a:ea typeface="Calibri" pitchFamily="34" charset="-122"/>
-                <a:cs typeface="Calibri" pitchFamily="34" charset="-120"/>
-              </a:rPr>
-              <a:t>Five roles from the course patterns, orchestrated in one loop.</a:t>
-            </a:r>
-            <a:endParaRPr lang="en-US" sz="1400" dirty="0"/>
-          </a:p>
-        </p:txBody>
-      </p:sp>
-      <p:sp>
-        <p:nvSpPr>
-          <p:cNvPr id="4" name="Shape 2"/>
-          <p:cNvSpPr/>
-          <p:nvPr/>
-        </p:nvSpPr>
-        <p:spPr>
-          <a:xfrm>
-            <a:off x="640080" y="1399032"/>
-            <a:ext cx="438912" cy="438912"/>
-          </a:xfrm>
-          <a:prstGeom prst="ellipse">
-            <a:avLst/>
-          </a:prstGeom>
-          <a:solidFill>
-            <a:srgbClr val="534AB7"/>
-          </a:solidFill>
-          <a:ln/>
-        </p:spPr>
-      </p:sp>
-      <p:pic>
-        <p:nvPicPr>
-          <p:cNvPr id="5" name="Image 0" descr="preencoded.png">    </p:cNvPr>
-          <p:cNvPicPr>
-            <a:picLocks noChangeAspect="1"/>
-          </p:cNvPicPr>
-          <p:nvPr/>
-        </p:nvPicPr>
-        <p:blipFill>
-          <a:blip r:embed="rId1"/>
-          <a:stretch>
-            <a:fillRect/>
-          </a:stretch>
-        </p:blipFill>
-        <p:spPr>
-          <a:xfrm>
-            <a:off x="749808" y="1508760"/>
-            <a:ext cx="219456" cy="219456"/>
-          </a:xfrm>
-          <a:prstGeom prst="rect">
-            <a:avLst/>
-          </a:prstGeom>
-        </p:spPr>
-      </p:pic>
-      <p:sp>
-        <p:nvSpPr>
-          <p:cNvPr id="6" name="Text 3"/>
-          <p:cNvSpPr/>
-          <p:nvPr/>
-        </p:nvSpPr>
-        <p:spPr>
-          <a:xfrm>
-            <a:off x="1280160" y="1371600"/>
-            <a:ext cx="2514600" cy="493776"/>
-          </a:xfrm>
-          <a:prstGeom prst="rect">
-            <a:avLst/>
-          </a:prstGeom>
-          <a:noFill/>
-          <a:ln/>
-        </p:spPr>
-        <p:txBody>
-          <a:bodyPr wrap="square" lIns="0" tIns="0" rIns="0" bIns="0" rtlCol="0" anchor="ctr"/>
-          <a:lstStyle/>
-          <a:p>
-            <a:pPr indent="0" marL="0">
-              <a:buNone/>
-            </a:pPr>
-            <a:r>
-              <a:rPr lang="en-US" sz="1500" b="1" dirty="0">
-                <a:solidFill>
-                  <a:srgbClr val="1F2430"/>
-                </a:solidFill>
-                <a:latin typeface="Cambria" pitchFamily="34" charset="0"/>
-                <a:ea typeface="Cambria" pitchFamily="34" charset="-122"/>
-                <a:cs typeface="Cambria" pitchFamily="34" charset="-120"/>
-              </a:rPr>
-              <a:t>Supervisor · ReAct</a:t>
-            </a:r>
-            <a:endParaRPr lang="en-US" sz="1500" dirty="0"/>
-          </a:p>
-        </p:txBody>
-      </p:sp>
-      <p:sp>
-        <p:nvSpPr>
-          <p:cNvPr id="7" name="Text 4"/>
-          <p:cNvSpPr/>
-          <p:nvPr/>
-        </p:nvSpPr>
-        <p:spPr>
-          <a:xfrm>
-            <a:off x="3840480" y="1371600"/>
-            <a:ext cx="4754880" cy="493776"/>
-          </a:xfrm>
-          <a:prstGeom prst="rect">
-            <a:avLst/>
-          </a:prstGeom>
-          <a:noFill/>
-          <a:ln/>
-        </p:spPr>
-        <p:txBody>
-          <a:bodyPr wrap="square" lIns="0" tIns="0" rIns="0" bIns="0" rtlCol="0" anchor="ctr"/>
-          <a:lstStyle/>
-          <a:p>
-            <a:pPr indent="0" marL="0">
-              <a:buNone/>
-            </a:pPr>
-            <a:r>
-              <a:rPr lang="en-US" sz="1250" dirty="0">
-                <a:solidFill>
-                  <a:srgbClr val="64708A"/>
-                </a:solidFill>
-                <a:latin typeface="Calibri" pitchFamily="34" charset="0"/>
-                <a:ea typeface="Calibri" pitchFamily="34" charset="-122"/>
-                <a:cs typeface="Calibri" pitchFamily="34" charset="-120"/>
-              </a:rPr>
-              <a:t>One GPT-4o-mini picks the next tool and closes each question.</a:t>
-            </a:r>
-            <a:endParaRPr lang="en-US" sz="1250" dirty="0"/>
-          </a:p>
-        </p:txBody>
-      </p:sp>
-      <p:sp>
-        <p:nvSpPr>
-          <p:cNvPr id="8" name="Shape 5"/>
-          <p:cNvSpPr/>
-          <p:nvPr/>
-        </p:nvSpPr>
-        <p:spPr>
-          <a:xfrm>
-            <a:off x="640080" y="1938528"/>
-            <a:ext cx="438912" cy="438912"/>
-          </a:xfrm>
-          <a:prstGeom prst="ellipse">
-            <a:avLst/>
-          </a:prstGeom>
-          <a:solidFill>
-            <a:srgbClr val="5F5E5A"/>
-          </a:solidFill>
-          <a:ln/>
-        </p:spPr>
-      </p:sp>
-      <p:pic>
-        <p:nvPicPr>
-          <p:cNvPr id="9" name="Image 1" descr="preencoded.png">    </p:cNvPr>
-          <p:cNvPicPr>
-            <a:picLocks noChangeAspect="1"/>
-          </p:cNvPicPr>
-          <p:nvPr/>
-        </p:nvPicPr>
-        <p:blipFill>
-          <a:blip r:embed="rId2"/>
-          <a:stretch>
-            <a:fillRect/>
-          </a:stretch>
-        </p:blipFill>
-        <p:spPr>
-          <a:xfrm>
-            <a:off x="749808" y="2048256"/>
-            <a:ext cx="219456" cy="219456"/>
-          </a:xfrm>
-          <a:prstGeom prst="rect">
-            <a:avLst/>
-          </a:prstGeom>
-        </p:spPr>
-      </p:pic>
-      <p:sp>
-        <p:nvSpPr>
-          <p:cNvPr id="10" name="Text 6"/>
-          <p:cNvSpPr/>
-          <p:nvPr/>
-        </p:nvSpPr>
-        <p:spPr>
-          <a:xfrm>
-            <a:off x="1280160" y="1911096"/>
-            <a:ext cx="2514600" cy="493776"/>
-          </a:xfrm>
-          <a:prstGeom prst="rect">
-            <a:avLst/>
-          </a:prstGeom>
-          <a:noFill/>
-          <a:ln/>
-        </p:spPr>
-        <p:txBody>
-          <a:bodyPr wrap="square" lIns="0" tIns="0" rIns="0" bIns="0" rtlCol="0" anchor="ctr"/>
-          <a:lstStyle/>
-          <a:p>
-            <a:pPr indent="0" marL="0">
-              <a:buNone/>
-            </a:pPr>
-            <a:r>
-              <a:rPr lang="en-US" sz="1500" b="1" dirty="0">
-                <a:solidFill>
-                  <a:srgbClr val="1F2430"/>
-                </a:solidFill>
-                <a:latin typeface="Cambria" pitchFamily="34" charset="0"/>
-                <a:ea typeface="Cambria" pitchFamily="34" charset="-122"/>
-                <a:cs typeface="Cambria" pitchFamily="34" charset="-120"/>
-              </a:rPr>
-              <a:t>Retriever · RAG</a:t>
-            </a:r>
-            <a:endParaRPr lang="en-US" sz="1500" dirty="0"/>
-          </a:p>
-        </p:txBody>
-      </p:sp>
-      <p:sp>
-        <p:nvSpPr>
-          <p:cNvPr id="11" name="Text 7"/>
-          <p:cNvSpPr/>
-          <p:nvPr/>
-        </p:nvSpPr>
-        <p:spPr>
-          <a:xfrm>
-            <a:off x="3840480" y="1911096"/>
-            <a:ext cx="4754880" cy="493776"/>
-          </a:xfrm>
-          <a:prstGeom prst="rect">
-            <a:avLst/>
-          </a:prstGeom>
-          <a:noFill/>
-          <a:ln/>
-        </p:spPr>
-        <p:txBody>
-          <a:bodyPr wrap="square" lIns="0" tIns="0" rIns="0" bIns="0" rtlCol="0" anchor="ctr"/>
-          <a:lstStyle/>
-          <a:p>
-            <a:pPr indent="0" marL="0">
-              <a:buNone/>
-            </a:pPr>
-            <a:r>
-              <a:rPr lang="en-US" sz="1250" dirty="0">
-                <a:solidFill>
-                  <a:srgbClr val="64708A"/>
-                </a:solidFill>
-                <a:latin typeface="Calibri" pitchFamily="34" charset="0"/>
-                <a:ea typeface="Calibri" pitchFamily="34" charset="-122"/>
-                <a:cs typeface="Calibri" pitchFamily="34" charset="-120"/>
-              </a:rPr>
-              <a:t>Pulls the official solution, rubric and graded examples.</a:t>
-            </a:r>
-            <a:endParaRPr lang="en-US" sz="1250" dirty="0"/>
-          </a:p>
-        </p:txBody>
-      </p:sp>
-      <p:sp>
-        <p:nvSpPr>
-          <p:cNvPr id="12" name="Shape 8"/>
-          <p:cNvSpPr/>
-          <p:nvPr/>
-        </p:nvSpPr>
-        <p:spPr>
-          <a:xfrm>
-            <a:off x="640080" y="2478024"/>
-            <a:ext cx="438912" cy="438912"/>
-          </a:xfrm>
-          <a:prstGeom prst="ellipse">
-            <a:avLst/>
-          </a:prstGeom>
-          <a:solidFill>
-            <a:srgbClr val="5F5E5A"/>
-          </a:solidFill>
-          <a:ln/>
-        </p:spPr>
-      </p:sp>
-      <p:pic>
-        <p:nvPicPr>
-          <p:cNvPr id="13" name="Image 2" descr="preencoded.png">    </p:cNvPr>
-          <p:cNvPicPr>
-            <a:picLocks noChangeAspect="1"/>
-          </p:cNvPicPr>
-          <p:nvPr/>
-        </p:nvPicPr>
-        <p:blipFill>
-          <a:blip r:embed="rId3"/>
-          <a:stretch>
-            <a:fillRect/>
-          </a:stretch>
-        </p:blipFill>
-        <p:spPr>
-          <a:xfrm>
-            <a:off x="749808" y="2587752"/>
-            <a:ext cx="219456" cy="219456"/>
-          </a:xfrm>
-          <a:prstGeom prst="rect">
-            <a:avLst/>
-          </a:prstGeom>
-        </p:spPr>
-      </p:pic>
-      <p:sp>
-        <p:nvSpPr>
-          <p:cNvPr id="14" name="Text 9"/>
-          <p:cNvSpPr/>
-          <p:nvPr/>
-        </p:nvSpPr>
-        <p:spPr>
-          <a:xfrm>
-            <a:off x="1280160" y="2450592"/>
-            <a:ext cx="2514600" cy="493776"/>
-          </a:xfrm>
-          <a:prstGeom prst="rect">
-            <a:avLst/>
-          </a:prstGeom>
-          <a:noFill/>
-          <a:ln/>
-        </p:spPr>
-        <p:txBody>
-          <a:bodyPr wrap="square" lIns="0" tIns="0" rIns="0" bIns="0" rtlCol="0" anchor="ctr"/>
-          <a:lstStyle/>
-          <a:p>
-            <a:pPr indent="0" marL="0">
-              <a:buNone/>
-            </a:pPr>
-            <a:r>
-              <a:rPr lang="en-US" sz="1500" b="1" dirty="0">
-                <a:solidFill>
-                  <a:srgbClr val="1F2430"/>
-                </a:solidFill>
-                <a:latin typeface="Cambria" pitchFamily="34" charset="0"/>
-                <a:ea typeface="Cambria" pitchFamily="34" charset="-122"/>
-                <a:cs typeface="Cambria" pitchFamily="34" charset="-120"/>
-              </a:rPr>
-              <a:t>Verifier · SymPy</a:t>
-            </a:r>
-            <a:endParaRPr lang="en-US" sz="1500" dirty="0"/>
-          </a:p>
-        </p:txBody>
-      </p:sp>
-      <p:sp>
-        <p:nvSpPr>
-          <p:cNvPr id="15" name="Text 10"/>
-          <p:cNvSpPr/>
-          <p:nvPr/>
-        </p:nvSpPr>
-        <p:spPr>
-          <a:xfrm>
-            <a:off x="3840480" y="2450592"/>
-            <a:ext cx="4754880" cy="493776"/>
-          </a:xfrm>
-          <a:prstGeom prst="rect">
-            <a:avLst/>
-          </a:prstGeom>
-          <a:noFill/>
-          <a:ln/>
-        </p:spPr>
-        <p:txBody>
-          <a:bodyPr wrap="square" lIns="0" tIns="0" rIns="0" bIns="0" rtlCol="0" anchor="ctr"/>
-          <a:lstStyle/>
-          <a:p>
-            <a:pPr indent="0" marL="0">
-              <a:buNone/>
-            </a:pPr>
-            <a:r>
-              <a:rPr lang="en-US" sz="1250" dirty="0">
-                <a:solidFill>
-                  <a:srgbClr val="64708A"/>
-                </a:solidFill>
-                <a:latin typeface="Calibri" pitchFamily="34" charset="0"/>
-                <a:ea typeface="Calibri" pitchFamily="34" charset="-122"/>
-                <a:cs typeface="Calibri" pitchFamily="34" charset="-120"/>
-              </a:rPr>
-              <a:t>Checks the math deterministically — no LLM, no guessing.</a:t>
-            </a:r>
-            <a:endParaRPr lang="en-US" sz="1250" dirty="0"/>
-          </a:p>
-        </p:txBody>
-      </p:sp>
-      <p:sp>
-        <p:nvSpPr>
-          <p:cNvPr id="16" name="Shape 11"/>
-          <p:cNvSpPr/>
-          <p:nvPr/>
-        </p:nvSpPr>
-        <p:spPr>
-          <a:xfrm>
-            <a:off x="640080" y="3017520"/>
-            <a:ext cx="438912" cy="438912"/>
-          </a:xfrm>
-          <a:prstGeom prst="ellipse">
-            <a:avLst/>
-          </a:prstGeom>
-          <a:solidFill>
-            <a:srgbClr val="1D8F73"/>
-          </a:solidFill>
-          <a:ln/>
-        </p:spPr>
-      </p:sp>
-      <p:pic>
-        <p:nvPicPr>
-          <p:cNvPr id="17" name="Image 3" descr="preencoded.png">    </p:cNvPr>
-          <p:cNvPicPr>
-            <a:picLocks noChangeAspect="1"/>
-          </p:cNvPicPr>
-          <p:nvPr/>
-        </p:nvPicPr>
-        <p:blipFill>
-          <a:blip r:embed="rId4"/>
-          <a:stretch>
-            <a:fillRect/>
-          </a:stretch>
-        </p:blipFill>
-        <p:spPr>
-          <a:xfrm>
-            <a:off x="749808" y="3127248"/>
-            <a:ext cx="219456" cy="219456"/>
-          </a:xfrm>
-          <a:prstGeom prst="rect">
-            <a:avLst/>
-          </a:prstGeom>
-        </p:spPr>
-      </p:pic>
-      <p:sp>
-        <p:nvSpPr>
-          <p:cNvPr id="18" name="Text 12"/>
-          <p:cNvSpPr/>
-          <p:nvPr/>
-        </p:nvSpPr>
-        <p:spPr>
-          <a:xfrm>
-            <a:off x="1280160" y="2990088"/>
-            <a:ext cx="2514600" cy="493776"/>
-          </a:xfrm>
-          <a:prstGeom prst="rect">
-            <a:avLst/>
-          </a:prstGeom>
-          <a:noFill/>
-          <a:ln/>
-        </p:spPr>
-        <p:txBody>
-          <a:bodyPr wrap="square" lIns="0" tIns="0" rIns="0" bIns="0" rtlCol="0" anchor="ctr"/>
-          <a:lstStyle/>
-          <a:p>
-            <a:pPr indent="0" marL="0">
-              <a:buNone/>
-            </a:pPr>
-            <a:r>
-              <a:rPr lang="en-US" sz="1500" b="1" dirty="0">
-                <a:solidFill>
-                  <a:srgbClr val="1F2430"/>
-                </a:solidFill>
-                <a:latin typeface="Cambria" pitchFamily="34" charset="0"/>
-                <a:ea typeface="Cambria" pitchFamily="34" charset="-122"/>
-                <a:cs typeface="Cambria" pitchFamily="34" charset="-120"/>
-              </a:rPr>
-              <a:t>Grader · Few-shot</a:t>
-            </a:r>
-            <a:endParaRPr lang="en-US" sz="1500" dirty="0"/>
-          </a:p>
-        </p:txBody>
-      </p:sp>
-      <p:sp>
-        <p:nvSpPr>
-          <p:cNvPr id="19" name="Text 13"/>
-          <p:cNvSpPr/>
-          <p:nvPr/>
-        </p:nvSpPr>
-        <p:spPr>
-          <a:xfrm>
-            <a:off x="3840480" y="2990088"/>
-            <a:ext cx="4754880" cy="493776"/>
-          </a:xfrm>
-          <a:prstGeom prst="rect">
-            <a:avLst/>
-          </a:prstGeom>
-          <a:noFill/>
-          <a:ln/>
-        </p:spPr>
-        <p:txBody>
-          <a:bodyPr wrap="square" lIns="0" tIns="0" rIns="0" bIns="0" rtlCol="0" anchor="ctr"/>
-          <a:lstStyle/>
-          <a:p>
-            <a:pPr indent="0" marL="0">
-              <a:buNone/>
-            </a:pPr>
-            <a:r>
-              <a:rPr lang="en-US" sz="1250" dirty="0">
-                <a:solidFill>
-                  <a:srgbClr val="64708A"/>
-                </a:solidFill>
-                <a:latin typeface="Calibri" pitchFamily="34" charset="0"/>
-                <a:ea typeface="Calibri" pitchFamily="34" charset="-122"/>
-                <a:cs typeface="Calibri" pitchFamily="34" charset="-120"/>
-              </a:rPr>
-              <a:t>Scores the student's own method, guided by graded examples.</a:t>
-            </a:r>
-            <a:endParaRPr lang="en-US" sz="1250" dirty="0"/>
-          </a:p>
-        </p:txBody>
-      </p:sp>
-      <p:sp>
-        <p:nvSpPr>
-          <p:cNvPr id="20" name="Shape 14"/>
-          <p:cNvSpPr/>
-          <p:nvPr/>
-        </p:nvSpPr>
-        <p:spPr>
-          <a:xfrm>
-            <a:off x="640080" y="3557016"/>
-            <a:ext cx="438912" cy="438912"/>
-          </a:xfrm>
-          <a:prstGeom prst="ellipse">
-            <a:avLst/>
-          </a:prstGeom>
-          <a:solidFill>
-            <a:srgbClr val="1D8F73"/>
-          </a:solidFill>
-          <a:ln/>
-        </p:spPr>
-      </p:sp>
-      <p:pic>
-        <p:nvPicPr>
-          <p:cNvPr id="21" name="Image 4" descr="preencoded.png">    </p:cNvPr>
-          <p:cNvPicPr>
-            <a:picLocks noChangeAspect="1"/>
-          </p:cNvPicPr>
-          <p:nvPr/>
-        </p:nvPicPr>
-        <p:blipFill>
-          <a:blip r:embed="rId5"/>
-          <a:stretch>
-            <a:fillRect/>
-          </a:stretch>
-        </p:blipFill>
-        <p:spPr>
-          <a:xfrm>
-            <a:off x="749808" y="3666744"/>
-            <a:ext cx="219456" cy="219456"/>
-          </a:xfrm>
-          <a:prstGeom prst="rect">
-            <a:avLst/>
-          </a:prstGeom>
-        </p:spPr>
-      </p:pic>
-      <p:sp>
-        <p:nvSpPr>
-          <p:cNvPr id="22" name="Text 15"/>
-          <p:cNvSpPr/>
-          <p:nvPr/>
-        </p:nvSpPr>
-        <p:spPr>
-          <a:xfrm>
-            <a:off x="1280160" y="3529584"/>
-            <a:ext cx="2514600" cy="493776"/>
-          </a:xfrm>
-          <a:prstGeom prst="rect">
-            <a:avLst/>
-          </a:prstGeom>
-          <a:noFill/>
-          <a:ln/>
-        </p:spPr>
-        <p:txBody>
-          <a:bodyPr wrap="square" lIns="0" tIns="0" rIns="0" bIns="0" rtlCol="0" anchor="ctr"/>
-          <a:lstStyle/>
-          <a:p>
-            <a:pPr indent="0" marL="0">
-              <a:buNone/>
-            </a:pPr>
-            <a:r>
-              <a:rPr lang="en-US" sz="1500" b="1" dirty="0">
-                <a:solidFill>
-                  <a:srgbClr val="1F2430"/>
-                </a:solidFill>
-                <a:latin typeface="Cambria" pitchFamily="34" charset="0"/>
-                <a:ea typeface="Cambria" pitchFamily="34" charset="-122"/>
-                <a:cs typeface="Cambria" pitchFamily="34" charset="-120"/>
-              </a:rPr>
-              <a:t>Reflector · Reflection</a:t>
-            </a:r>
-            <a:endParaRPr lang="en-US" sz="1500" dirty="0"/>
-          </a:p>
-        </p:txBody>
-      </p:sp>
-      <p:sp>
-        <p:nvSpPr>
-          <p:cNvPr id="23" name="Text 16"/>
-          <p:cNvSpPr/>
-          <p:nvPr/>
-        </p:nvSpPr>
-        <p:spPr>
-          <a:xfrm>
-            <a:off x="3840480" y="3529584"/>
-            <a:ext cx="4754880" cy="493776"/>
-          </a:xfrm>
-          <a:prstGeom prst="rect">
-            <a:avLst/>
-          </a:prstGeom>
-          <a:noFill/>
-          <a:ln/>
-        </p:spPr>
-        <p:txBody>
-          <a:bodyPr wrap="square" lIns="0" tIns="0" rIns="0" bIns="0" rtlCol="0" anchor="ctr"/>
-          <a:lstStyle/>
-          <a:p>
-            <a:pPr indent="0" marL="0">
-              <a:buNone/>
-            </a:pPr>
-            <a:r>
-              <a:rPr lang="en-US" sz="1250" dirty="0">
-                <a:solidFill>
-                  <a:srgbClr val="64708A"/>
-                </a:solidFill>
-                <a:latin typeface="Calibri" pitchFamily="34" charset="0"/>
-                <a:ea typeface="Calibri" pitchFamily="34" charset="-122"/>
-                <a:cs typeface="Calibri" pitchFamily="34" charset="-120"/>
-              </a:rPr>
-              <a:t>Critiques borderline grades; Supervisor re-grades if needed.</a:t>
-            </a:r>
-            <a:endParaRPr lang="en-US" sz="1250" dirty="0"/>
-          </a:p>
-        </p:txBody>
-      </p:sp>
-      <p:sp>
-        <p:nvSpPr>
-          <p:cNvPr id="24" name="Shape 17"/>
-          <p:cNvSpPr/>
-          <p:nvPr/>
-        </p:nvSpPr>
-        <p:spPr>
-          <a:xfrm>
-            <a:off x="548640" y="4160520"/>
-            <a:ext cx="8046720" cy="566928"/>
+          <p:cNvPr id="3" name="Shape 1"/>
+          <p:cNvSpPr/>
+          <p:nvPr/>
+        </p:nvSpPr>
+        <p:spPr>
+          <a:xfrm>
+            <a:off x="548640" y="1600200"/>
+            <a:ext cx="2560320" cy="2286000"/>
           </a:xfrm>
           <a:prstGeom prst="roundRect">
             <a:avLst>
-              <a:gd name="adj" fmla="val 12903"/>
-            </a:avLst>
-          </a:prstGeom>
-          <a:solidFill>
-            <a:srgbClr val="F3F4FB"/>
-          </a:solidFill>
-          <a:ln/>
-        </p:spPr>
-      </p:sp>
-      <p:pic>
-        <p:nvPicPr>
-          <p:cNvPr id="25" name="Image 5" descr="preencoded.png">    </p:cNvPr>
-          <p:cNvPicPr>
-            <a:picLocks noChangeAspect="1"/>
-          </p:cNvPicPr>
-          <p:nvPr/>
-        </p:nvPicPr>
-        <p:blipFill>
-          <a:blip r:embed="rId6"/>
-          <a:stretch>
-            <a:fillRect/>
-          </a:stretch>
-        </p:blipFill>
-        <p:spPr>
-          <a:xfrm>
-            <a:off x="777240" y="4315968"/>
-            <a:ext cx="256032" cy="256032"/>
-          </a:xfrm>
-          <a:prstGeom prst="rect">
-            <a:avLst/>
-          </a:prstGeom>
-        </p:spPr>
-      </p:pic>
-      <p:sp>
-        <p:nvSpPr>
-          <p:cNvPr id="26" name="Text 18"/>
-          <p:cNvSpPr/>
-          <p:nvPr/>
-        </p:nvSpPr>
-        <p:spPr>
-          <a:xfrm>
-            <a:off x="1188720" y="4160520"/>
-            <a:ext cx="7223760" cy="566928"/>
-          </a:xfrm>
-          <a:prstGeom prst="rect">
-            <a:avLst/>
-          </a:prstGeom>
-          <a:noFill/>
-          <a:ln/>
-        </p:spPr>
-        <p:txBody>
-          <a:bodyPr wrap="square" lIns="0" tIns="0" rIns="0" bIns="0" rtlCol="0" anchor="ctr"/>
-          <a:lstStyle/>
-          <a:p>
-            <a:pPr indent="0" marL="0">
-              <a:lnSpc>
-                <a:spcPct val="100000"/>
-              </a:lnSpc>
-              <a:buNone/>
-            </a:pPr>
-            <a:r>
-              <a:rPr lang="en-US" sz="1250" b="1" dirty="0">
-                <a:solidFill>
-                  <a:srgbClr val="1F2430"/>
-                </a:solidFill>
-                <a:latin typeface="Calibri" pitchFamily="34" charset="0"/>
-                <a:ea typeface="Calibri" pitchFamily="34" charset="-122"/>
-                <a:cs typeface="Calibri" pitchFamily="34" charset="-120"/>
-              </a:rPr>
-              <a:t>One model, many roles. </a:t>
-            </a:r>
-            <a:pPr indent="0" marL="0">
-              <a:lnSpc>
-                <a:spcPct val="100000"/>
-              </a:lnSpc>
-              <a:buNone/>
-            </a:pPr>
-            <a:r>
-              <a:rPr lang="en-US" sz="1250" dirty="0">
-                <a:solidFill>
-                  <a:srgbClr val="1F2430"/>
-                </a:solidFill>
-                <a:latin typeface="Calibri" pitchFamily="34" charset="0"/>
-                <a:ea typeface="Calibri" pitchFamily="34" charset="-122"/>
-                <a:cs typeface="Calibri" pitchFamily="34" charset="-120"/>
-              </a:rPr>
-              <a:t>The Supervisor is a tool-calling loop, not a separate LLM — and every call it makes becomes a step in the </a:t>
-            </a:r>
-            <a:pPr indent="0" marL="0">
-              <a:lnSpc>
-                <a:spcPct val="100000"/>
-              </a:lnSpc>
-              <a:buNone/>
-            </a:pPr>
-            <a:r>
-              <a:rPr lang="en-US" sz="1250" b="1" dirty="0">
-                <a:solidFill>
-                  <a:srgbClr val="534AB7"/>
-                </a:solidFill>
-                <a:latin typeface="Calibri" pitchFamily="34" charset="0"/>
-                <a:ea typeface="Calibri" pitchFamily="34" charset="-122"/>
-                <a:cs typeface="Calibri" pitchFamily="34" charset="-120"/>
-              </a:rPr>
-              <a:t>steps[]</a:t>
-            </a:r>
-            <a:pPr indent="0" marL="0">
-              <a:lnSpc>
-                <a:spcPct val="100000"/>
-              </a:lnSpc>
-              <a:buNone/>
-            </a:pPr>
-            <a:r>
-              <a:rPr lang="en-US" sz="1250" dirty="0">
-                <a:solidFill>
-                  <a:srgbClr val="1F2430"/>
-                </a:solidFill>
-                <a:latin typeface="Calibri" pitchFamily="34" charset="0"/>
-                <a:ea typeface="Calibri" pitchFamily="34" charset="-122"/>
-                <a:cs typeface="Calibri" pitchFamily="34" charset="-120"/>
-              </a:rPr>
-              <a:t> trace.</a:t>
-            </a:r>
-            <a:endParaRPr lang="en-US" sz="1250" dirty="0"/>
-          </a:p>
-        </p:txBody>
-      </p:sp>
-    </p:spTree>
-  </p:cSld>
-  <p:clrMapOvr>
-    <a:masterClrMapping/>
-  </p:clrMapOvr>
-</p:sld>
-</file>
-
-<file path=ppt/slides/slide8.xml><?xml version="1.0" encoding="utf-8"?>
-<p:sld xmlns:a="http://schemas.openxmlformats.org/drawingml/2006/main" xmlns:r="http://schemas.openxmlformats.org/officeDocument/2006/relationships" xmlns:p="http://schemas.openxmlformats.org/presentationml/2006/main">
-  <p:cSld name="Slide 8">
-    <p:bg>
-      <p:bgPr>
-        <a:solidFill>
-          <a:srgbClr val="F3F4FB"/>
-        </a:solidFill>
-      </p:bgPr>
-    </p:bg>
-    <p:spTree>
-      <p:nvGrpSpPr>
-        <p:cNvPr id="1" name=""/>
-        <p:cNvGrpSpPr/>
-        <p:nvPr/>
-      </p:nvGrpSpPr>
-      <p:grpSpPr>
-        <a:xfrm>
-          <a:off x="0" y="0"/>
-          <a:ext cx="0" cy="0"/>
-          <a:chOff x="0" y="0"/>
-          <a:chExt cx="0" cy="0"/>
-        </a:xfrm>
-      </p:grpSpPr>
-      <p:sp>
-        <p:nvSpPr>
-          <p:cNvPr id="2" name="Text 0"/>
-          <p:cNvSpPr/>
-          <p:nvPr/>
-        </p:nvSpPr>
-        <p:spPr>
-          <a:xfrm>
-            <a:off x="548640" y="384048"/>
-            <a:ext cx="8046720" cy="640080"/>
-          </a:xfrm>
-          <a:prstGeom prst="rect">
-            <a:avLst/>
-          </a:prstGeom>
-          <a:noFill/>
-          <a:ln/>
-        </p:spPr>
-        <p:txBody>
-          <a:bodyPr wrap="square" lIns="0" tIns="0" rIns="0" bIns="0" rtlCol="0" anchor="ctr"/>
-          <a:lstStyle/>
-          <a:p>
-            <a:pPr algn="l" indent="0" marL="0">
-              <a:buNone/>
-            </a:pPr>
-            <a:r>
-              <a:rPr lang="en-US" sz="3000" b="1" dirty="0">
-                <a:solidFill>
-                  <a:srgbClr val="1F2430"/>
-                </a:solidFill>
-                <a:latin typeface="Cambria" pitchFamily="34" charset="0"/>
-                <a:ea typeface="Cambria" pitchFamily="34" charset="-122"/>
-                <a:cs typeface="Cambria" pitchFamily="34" charset="-120"/>
-              </a:rPr>
-              <a:t>It decides — it doesn't follow a script</a:t>
-            </a:r>
-            <a:endParaRPr lang="en-US" sz="3000" dirty="0"/>
-          </a:p>
-        </p:txBody>
-      </p:sp>
-      <p:sp>
-        <p:nvSpPr>
-          <p:cNvPr id="3" name="Shape 1"/>
-          <p:cNvSpPr/>
-          <p:nvPr/>
-        </p:nvSpPr>
-        <p:spPr>
-          <a:xfrm>
-            <a:off x="548640" y="1737360"/>
-            <a:ext cx="1463040" cy="777240"/>
-          </a:xfrm>
-          <a:prstGeom prst="roundRect">
-            <a:avLst>
-              <a:gd name="adj" fmla="val 9412"/>
-            </a:avLst>
-          </a:prstGeom>
-          <a:solidFill>
-            <a:srgbClr val="FFFFFF"/>
-          </a:solidFill>
-          <a:ln w="15875">
-            <a:solidFill>
-              <a:srgbClr val="534AB7"/>
-            </a:solidFill>
-            <a:prstDash val="solid"/>
-          </a:ln>
-          <a:effectLst>
-            <a:outerShdw sx="100000" sy="100000" kx="0" ky="0" algn="bl" rotWithShape="0" blurRad="88900" dist="38100" dir="5400000">
-              <a:srgbClr val="000000">
-                <a:alpha val="16000"/>
-              </a:srgbClr>
-            </a:outerShdw>
-          </a:effectLst>
-        </p:spPr>
-      </p:sp>
-      <p:sp>
-        <p:nvSpPr>
-          <p:cNvPr id="4" name="Text 2"/>
-          <p:cNvSpPr/>
-          <p:nvPr/>
-        </p:nvSpPr>
-        <p:spPr>
-          <a:xfrm>
-            <a:off x="548640" y="1737360"/>
-            <a:ext cx="1463040" cy="777240"/>
-          </a:xfrm>
-          <a:prstGeom prst="rect">
-            <a:avLst/>
-          </a:prstGeom>
-          <a:noFill/>
-          <a:ln/>
-        </p:spPr>
-        <p:txBody>
-          <a:bodyPr wrap="square" lIns="0" tIns="0" rIns="0" bIns="0" rtlCol="0" anchor="ctr"/>
-          <a:lstStyle/>
-          <a:p>
-            <a:pPr algn="ctr" indent="0" marL="0">
-              <a:buNone/>
-            </a:pPr>
-            <a:r>
-              <a:rPr lang="en-US" sz="1400" b="1" dirty="0">
-                <a:solidFill>
-                  <a:srgbClr val="534AB7"/>
-                </a:solidFill>
-                <a:latin typeface="Calibri" pitchFamily="34" charset="0"/>
-                <a:ea typeface="Calibri" pitchFamily="34" charset="-122"/>
-                <a:cs typeface="Calibri" pitchFamily="34" charset="-120"/>
-              </a:rPr>
-              <a:t>Read</a:t>
-            </a:r>
-            <a:endParaRPr lang="en-US" sz="1400" dirty="0"/>
-          </a:p>
-        </p:txBody>
-      </p:sp>
-      <p:sp>
-        <p:nvSpPr>
-          <p:cNvPr id="5" name="Shape 3"/>
-          <p:cNvSpPr/>
-          <p:nvPr/>
-        </p:nvSpPr>
-        <p:spPr>
-          <a:xfrm>
-            <a:off x="2011680" y="2125980"/>
-            <a:ext cx="182880" cy="0"/>
-          </a:xfrm>
-          <a:prstGeom prst="line">
-            <a:avLst/>
-          </a:prstGeom>
-          <a:noFill/>
-          <a:ln w="19050">
-            <a:solidFill>
-              <a:srgbClr val="8A93A8"/>
-            </a:solidFill>
-            <a:prstDash val="solid"/>
-            <a:tailEnd type="triangle"/>
-          </a:ln>
-        </p:spPr>
-      </p:sp>
-      <p:sp>
-        <p:nvSpPr>
-          <p:cNvPr id="6" name="Shape 4"/>
-          <p:cNvSpPr/>
-          <p:nvPr/>
-        </p:nvSpPr>
-        <p:spPr>
-          <a:xfrm>
-            <a:off x="2194560" y="1737360"/>
-            <a:ext cx="1463040" cy="777240"/>
-          </a:xfrm>
-          <a:prstGeom prst="roundRect">
-            <a:avLst>
-              <a:gd name="adj" fmla="val 9412"/>
-            </a:avLst>
-          </a:prstGeom>
-          <a:solidFill>
-            <a:srgbClr val="FFFFFF"/>
-          </a:solidFill>
-          <a:ln w="15875">
-            <a:solidFill>
-              <a:srgbClr val="534AB7"/>
-            </a:solidFill>
-            <a:prstDash val="solid"/>
-          </a:ln>
-          <a:effectLst>
-            <a:outerShdw sx="100000" sy="100000" kx="0" ky="0" algn="bl" rotWithShape="0" blurRad="88900" dist="38100" dir="5400000">
-              <a:srgbClr val="000000">
-                <a:alpha val="16000"/>
-              </a:srgbClr>
-            </a:outerShdw>
-          </a:effectLst>
-        </p:spPr>
-      </p:sp>
-      <p:sp>
-        <p:nvSpPr>
-          <p:cNvPr id="7" name="Text 5"/>
-          <p:cNvSpPr/>
-          <p:nvPr/>
-        </p:nvSpPr>
-        <p:spPr>
-          <a:xfrm>
-            <a:off x="2194560" y="1737360"/>
-            <a:ext cx="1463040" cy="777240"/>
-          </a:xfrm>
-          <a:prstGeom prst="rect">
-            <a:avLst/>
-          </a:prstGeom>
-          <a:noFill/>
-          <a:ln/>
-        </p:spPr>
-        <p:txBody>
-          <a:bodyPr wrap="square" lIns="0" tIns="0" rIns="0" bIns="0" rtlCol="0" anchor="ctr"/>
-          <a:lstStyle/>
-          <a:p>
-            <a:pPr algn="ctr" indent="0" marL="0">
-              <a:buNone/>
-            </a:pPr>
-            <a:r>
-              <a:rPr lang="en-US" sz="1400" b="1" dirty="0">
-                <a:solidFill>
-                  <a:srgbClr val="534AB7"/>
-                </a:solidFill>
-                <a:latin typeface="Calibri" pitchFamily="34" charset="0"/>
-                <a:ea typeface="Calibri" pitchFamily="34" charset="-122"/>
-                <a:cs typeface="Calibri" pitchFamily="34" charset="-120"/>
-              </a:rPr>
-              <a:t>Retrieve</a:t>
-            </a:r>
-            <a:endParaRPr lang="en-US" sz="1400" dirty="0"/>
-          </a:p>
-        </p:txBody>
-      </p:sp>
-      <p:sp>
-        <p:nvSpPr>
-          <p:cNvPr id="8" name="Shape 6"/>
-          <p:cNvSpPr/>
-          <p:nvPr/>
-        </p:nvSpPr>
-        <p:spPr>
-          <a:xfrm>
-            <a:off x="3657600" y="2125980"/>
-            <a:ext cx="182880" cy="0"/>
-          </a:xfrm>
-          <a:prstGeom prst="line">
-            <a:avLst/>
-          </a:prstGeom>
-          <a:noFill/>
-          <a:ln w="19050">
-            <a:solidFill>
-              <a:srgbClr val="8A93A8"/>
-            </a:solidFill>
-            <a:prstDash val="solid"/>
-            <a:tailEnd type="triangle"/>
-          </a:ln>
-        </p:spPr>
-      </p:sp>
-      <p:sp>
-        <p:nvSpPr>
-          <p:cNvPr id="9" name="Shape 7"/>
-          <p:cNvSpPr/>
-          <p:nvPr/>
-        </p:nvSpPr>
-        <p:spPr>
-          <a:xfrm>
-            <a:off x="3840480" y="1737360"/>
-            <a:ext cx="1463040" cy="777240"/>
-          </a:xfrm>
-          <a:prstGeom prst="roundRect">
-            <a:avLst>
-              <a:gd name="adj" fmla="val 9412"/>
-            </a:avLst>
-          </a:prstGeom>
-          <a:solidFill>
-            <a:srgbClr val="FFFFFF"/>
-          </a:solidFill>
-          <a:ln w="15875">
-            <a:solidFill>
-              <a:srgbClr val="534AB7"/>
-            </a:solidFill>
-            <a:prstDash val="solid"/>
-          </a:ln>
-          <a:effectLst>
-            <a:outerShdw sx="100000" sy="100000" kx="0" ky="0" algn="bl" rotWithShape="0" blurRad="88900" dist="38100" dir="5400000">
-              <a:srgbClr val="000000">
-                <a:alpha val="16000"/>
-              </a:srgbClr>
-            </a:outerShdw>
-          </a:effectLst>
-        </p:spPr>
-      </p:sp>
-      <p:sp>
-        <p:nvSpPr>
-          <p:cNvPr id="10" name="Text 8"/>
-          <p:cNvSpPr/>
-          <p:nvPr/>
-        </p:nvSpPr>
-        <p:spPr>
-          <a:xfrm>
-            <a:off x="3840480" y="1737360"/>
-            <a:ext cx="1463040" cy="777240"/>
-          </a:xfrm>
-          <a:prstGeom prst="rect">
-            <a:avLst/>
-          </a:prstGeom>
-          <a:noFill/>
-          <a:ln/>
-        </p:spPr>
-        <p:txBody>
-          <a:bodyPr wrap="square" lIns="0" tIns="0" rIns="0" bIns="0" rtlCol="0" anchor="ctr"/>
-          <a:lstStyle/>
-          <a:p>
-            <a:pPr algn="ctr" indent="0" marL="0">
-              <a:buNone/>
-            </a:pPr>
-            <a:r>
-              <a:rPr lang="en-US" sz="1400" b="1" dirty="0">
-                <a:solidFill>
-                  <a:srgbClr val="534AB7"/>
-                </a:solidFill>
-                <a:latin typeface="Calibri" pitchFamily="34" charset="0"/>
-                <a:ea typeface="Calibri" pitchFamily="34" charset="-122"/>
-                <a:cs typeface="Calibri" pitchFamily="34" charset="-120"/>
-              </a:rPr>
-              <a:t>Verify</a:t>
-            </a:r>
-            <a:endParaRPr lang="en-US" sz="1400" dirty="0"/>
-          </a:p>
-        </p:txBody>
-      </p:sp>
-      <p:sp>
-        <p:nvSpPr>
-          <p:cNvPr id="11" name="Shape 9"/>
-          <p:cNvSpPr/>
-          <p:nvPr/>
-        </p:nvSpPr>
-        <p:spPr>
-          <a:xfrm>
-            <a:off x="5303520" y="2125980"/>
-            <a:ext cx="182880" cy="0"/>
-          </a:xfrm>
-          <a:prstGeom prst="line">
-            <a:avLst/>
-          </a:prstGeom>
-          <a:noFill/>
-          <a:ln w="19050">
-            <a:solidFill>
-              <a:srgbClr val="8A93A8"/>
-            </a:solidFill>
-            <a:prstDash val="solid"/>
-            <a:tailEnd type="triangle"/>
-          </a:ln>
-        </p:spPr>
-      </p:sp>
-      <p:sp>
-        <p:nvSpPr>
-          <p:cNvPr id="12" name="Shape 10"/>
-          <p:cNvSpPr/>
-          <p:nvPr/>
-        </p:nvSpPr>
-        <p:spPr>
-          <a:xfrm>
-            <a:off x="5486400" y="1737360"/>
-            <a:ext cx="1463040" cy="777240"/>
-          </a:xfrm>
-          <a:prstGeom prst="roundRect">
-            <a:avLst>
-              <a:gd name="adj" fmla="val 9412"/>
-            </a:avLst>
-          </a:prstGeom>
-          <a:solidFill>
-            <a:srgbClr val="FFFFFF"/>
-          </a:solidFill>
-          <a:ln w="15875">
-            <a:solidFill>
-              <a:srgbClr val="534AB7"/>
-            </a:solidFill>
-            <a:prstDash val="solid"/>
-          </a:ln>
-          <a:effectLst>
-            <a:outerShdw sx="100000" sy="100000" kx="0" ky="0" algn="bl" rotWithShape="0" blurRad="88900" dist="38100" dir="5400000">
-              <a:srgbClr val="000000">
-                <a:alpha val="16000"/>
-              </a:srgbClr>
-            </a:outerShdw>
-          </a:effectLst>
-        </p:spPr>
-      </p:sp>
-      <p:sp>
-        <p:nvSpPr>
-          <p:cNvPr id="13" name="Text 11"/>
-          <p:cNvSpPr/>
-          <p:nvPr/>
-        </p:nvSpPr>
-        <p:spPr>
-          <a:xfrm>
-            <a:off x="5486400" y="1737360"/>
-            <a:ext cx="1463040" cy="777240"/>
-          </a:xfrm>
-          <a:prstGeom prst="rect">
-            <a:avLst/>
-          </a:prstGeom>
-          <a:noFill/>
-          <a:ln/>
-        </p:spPr>
-        <p:txBody>
-          <a:bodyPr wrap="square" lIns="0" tIns="0" rIns="0" bIns="0" rtlCol="0" anchor="ctr"/>
-          <a:lstStyle/>
-          <a:p>
-            <a:pPr algn="ctr" indent="0" marL="0">
-              <a:buNone/>
-            </a:pPr>
-            <a:r>
-              <a:rPr lang="en-US" sz="1400" b="1" dirty="0">
-                <a:solidFill>
-                  <a:srgbClr val="534AB7"/>
-                </a:solidFill>
-                <a:latin typeface="Calibri" pitchFamily="34" charset="0"/>
-                <a:ea typeface="Calibri" pitchFamily="34" charset="-122"/>
-                <a:cs typeface="Calibri" pitchFamily="34" charset="-120"/>
-              </a:rPr>
-              <a:t>Grade</a:t>
-            </a:r>
-            <a:endParaRPr lang="en-US" sz="1400" dirty="0"/>
-          </a:p>
-        </p:txBody>
-      </p:sp>
-      <p:sp>
-        <p:nvSpPr>
-          <p:cNvPr id="14" name="Shape 12"/>
-          <p:cNvSpPr/>
-          <p:nvPr/>
-        </p:nvSpPr>
-        <p:spPr>
-          <a:xfrm>
-            <a:off x="6949440" y="2125980"/>
-            <a:ext cx="182880" cy="0"/>
-          </a:xfrm>
-          <a:prstGeom prst="line">
-            <a:avLst/>
-          </a:prstGeom>
-          <a:noFill/>
-          <a:ln w="19050">
-            <a:solidFill>
-              <a:srgbClr val="8A93A8"/>
-            </a:solidFill>
-            <a:prstDash val="solid"/>
-            <a:tailEnd type="triangle"/>
-          </a:ln>
-        </p:spPr>
-      </p:sp>
-      <p:sp>
-        <p:nvSpPr>
-          <p:cNvPr id="15" name="Shape 13"/>
-          <p:cNvSpPr/>
-          <p:nvPr/>
-        </p:nvSpPr>
-        <p:spPr>
-          <a:xfrm>
-            <a:off x="7132320" y="1737360"/>
-            <a:ext cx="1463040" cy="777240"/>
-          </a:xfrm>
-          <a:prstGeom prst="roundRect">
-            <a:avLst>
-              <a:gd name="adj" fmla="val 9412"/>
-            </a:avLst>
-          </a:prstGeom>
-          <a:solidFill>
-            <a:srgbClr val="FFFFFF"/>
-          </a:solidFill>
-          <a:ln w="15875">
-            <a:solidFill>
-              <a:srgbClr val="534AB7"/>
-            </a:solidFill>
-            <a:prstDash val="solid"/>
-          </a:ln>
-          <a:effectLst>
-            <a:outerShdw sx="100000" sy="100000" kx="0" ky="0" algn="bl" rotWithShape="0" blurRad="88900" dist="38100" dir="5400000">
-              <a:srgbClr val="000000">
-                <a:alpha val="16000"/>
-              </a:srgbClr>
-            </a:outerShdw>
-          </a:effectLst>
-        </p:spPr>
-      </p:sp>
-      <p:sp>
-        <p:nvSpPr>
-          <p:cNvPr id="16" name="Text 14"/>
-          <p:cNvSpPr/>
-          <p:nvPr/>
-        </p:nvSpPr>
-        <p:spPr>
-          <a:xfrm>
-            <a:off x="7132320" y="1737360"/>
-            <a:ext cx="1463040" cy="777240"/>
-          </a:xfrm>
-          <a:prstGeom prst="rect">
-            <a:avLst/>
-          </a:prstGeom>
-          <a:noFill/>
-          <a:ln/>
-        </p:spPr>
-        <p:txBody>
-          <a:bodyPr wrap="square" lIns="0" tIns="0" rIns="0" bIns="0" rtlCol="0" anchor="ctr"/>
-          <a:lstStyle/>
-          <a:p>
-            <a:pPr algn="ctr" indent="0" marL="0">
-              <a:buNone/>
-            </a:pPr>
-            <a:r>
-              <a:rPr lang="en-US" sz="1400" b="1" dirty="0">
-                <a:solidFill>
-                  <a:srgbClr val="534AB7"/>
-                </a:solidFill>
-                <a:latin typeface="Calibri" pitchFamily="34" charset="0"/>
-                <a:ea typeface="Calibri" pitchFamily="34" charset="-122"/>
-                <a:cs typeface="Calibri" pitchFamily="34" charset="-120"/>
-              </a:rPr>
-              <a:t>Reflect</a:t>
-            </a:r>
-            <a:endParaRPr lang="en-US" sz="1400" dirty="0"/>
-          </a:p>
-        </p:txBody>
-      </p:sp>
-      <p:sp>
-        <p:nvSpPr>
-          <p:cNvPr id="17" name="Shape 15"/>
-          <p:cNvSpPr/>
-          <p:nvPr/>
-        </p:nvSpPr>
-        <p:spPr>
-          <a:xfrm>
-            <a:off x="1280160" y="2880360"/>
-            <a:ext cx="6583680" cy="0"/>
-          </a:xfrm>
-          <a:prstGeom prst="line">
-            <a:avLst/>
-          </a:prstGeom>
-          <a:noFill/>
-          <a:ln w="22225">
-            <a:solidFill>
-              <a:srgbClr val="1D8F73"/>
-            </a:solidFill>
-            <a:prstDash val="dash"/>
-            <a:headEnd type="triangle"/>
-          </a:ln>
-        </p:spPr>
-      </p:sp>
-      <p:sp>
-        <p:nvSpPr>
-          <p:cNvPr id="18" name="Shape 16"/>
-          <p:cNvSpPr/>
-          <p:nvPr/>
-        </p:nvSpPr>
-        <p:spPr>
-          <a:xfrm>
-            <a:off x="7863840" y="2514600"/>
-            <a:ext cx="0" cy="365760"/>
-          </a:xfrm>
-          <a:prstGeom prst="line">
-            <a:avLst/>
-          </a:prstGeom>
-          <a:noFill/>
-          <a:ln w="22225">
-            <a:solidFill>
-              <a:srgbClr val="1D8F73"/>
-            </a:solidFill>
-            <a:prstDash val="dash"/>
-          </a:ln>
-        </p:spPr>
-      </p:sp>
-      <p:sp>
-        <p:nvSpPr>
-          <p:cNvPr id="19" name="Shape 17"/>
-          <p:cNvSpPr/>
-          <p:nvPr/>
-        </p:nvSpPr>
-        <p:spPr>
-          <a:xfrm>
-            <a:off x="1280160" y="2514600"/>
-            <a:ext cx="0" cy="365760"/>
-          </a:xfrm>
-          <a:prstGeom prst="line">
-            <a:avLst/>
-          </a:prstGeom>
-          <a:noFill/>
-          <a:ln w="22225">
-            <a:solidFill>
-              <a:srgbClr val="1D8F73"/>
-            </a:solidFill>
-            <a:prstDash val="dash"/>
-            <a:tailEnd type="triangle"/>
-          </a:ln>
-        </p:spPr>
-      </p:sp>
-      <p:sp>
-        <p:nvSpPr>
-          <p:cNvPr id="20" name="Text 18"/>
-          <p:cNvSpPr/>
-          <p:nvPr/>
-        </p:nvSpPr>
-        <p:spPr>
-          <a:xfrm>
-            <a:off x="2651760" y="2907792"/>
-            <a:ext cx="3840480" cy="320040"/>
-          </a:xfrm>
-          <a:prstGeom prst="rect">
-            <a:avLst/>
-          </a:prstGeom>
-          <a:noFill/>
-          <a:ln/>
-        </p:spPr>
-        <p:txBody>
-          <a:bodyPr wrap="square" lIns="0" tIns="0" rIns="0" bIns="0" rtlCol="0" anchor="ctr"/>
-          <a:lstStyle/>
-          <a:p>
-            <a:pPr algn="ctr" indent="0" marL="0">
-              <a:buNone/>
-            </a:pPr>
-            <a:r>
-              <a:rPr lang="en-US" sz="1100" i="1" dirty="0">
-                <a:solidFill>
-                  <a:srgbClr val="1D8F73"/>
-                </a:solidFill>
-                <a:latin typeface="Calibri" pitchFamily="34" charset="0"/>
-                <a:ea typeface="Calibri" pitchFamily="34" charset="-122"/>
-                <a:cs typeface="Calibri" pitchFamily="34" charset="-120"/>
-              </a:rPr>
-              <a:t>per question  ·  loops until confident</a:t>
-            </a:r>
-            <a:endParaRPr lang="en-US" sz="1100" dirty="0"/>
-          </a:p>
-        </p:txBody>
-      </p:sp>
-      <p:sp>
-        <p:nvSpPr>
-          <p:cNvPr id="21" name="Shape 19"/>
-          <p:cNvSpPr/>
-          <p:nvPr/>
-        </p:nvSpPr>
-        <p:spPr>
-          <a:xfrm>
-            <a:off x="548640" y="3474720"/>
-            <a:ext cx="8046720" cy="1051560"/>
-          </a:xfrm>
-          <a:prstGeom prst="roundRect">
-            <a:avLst>
-              <a:gd name="adj" fmla="val 6957"/>
+              <a:gd name="adj" fmla="val 3600"/>
             </a:avLst>
           </a:prstGeom>
           <a:solidFill>
@@ -7685,9 +7009,29 @@
           </a:effectLst>
         </p:spPr>
       </p:sp>
+      <p:sp>
+        <p:nvSpPr>
+          <p:cNvPr id="4" name="Shape 2"/>
+          <p:cNvSpPr/>
+          <p:nvPr/>
+        </p:nvSpPr>
+        <p:spPr>
+          <a:xfrm>
+            <a:off x="822960" y="1874520"/>
+            <a:ext cx="658368" cy="658368"/>
+          </a:xfrm>
+          <a:prstGeom prst="ellipse">
+            <a:avLst/>
+          </a:prstGeom>
+          <a:solidFill>
+            <a:srgbClr val="1D8F73"/>
+          </a:solidFill>
+          <a:ln/>
+        </p:spPr>
+      </p:sp>
       <p:pic>
         <p:nvPicPr>
-          <p:cNvPr id="22" name="Image 0" descr="preencoded.png">    </p:cNvPr>
+          <p:cNvPr id="5" name="Image 0" descr="preencoded.png"/>
           <p:cNvPicPr>
             <a:picLocks noChangeAspect="1"/>
           </p:cNvPicPr>
@@ -7701,8 +7045,8 @@
         </p:blipFill>
         <p:spPr>
           <a:xfrm>
-            <a:off x="822960" y="3767328"/>
-            <a:ext cx="457200" cy="457200"/>
+            <a:off x="987552" y="2039112"/>
+            <a:ext cx="329184" cy="329184"/>
           </a:xfrm>
           <a:prstGeom prst="rect">
             <a:avLst/>
@@ -7711,14 +7055,14 @@
       </p:pic>
       <p:sp>
         <p:nvSpPr>
-          <p:cNvPr id="23" name="Text 20"/>
-          <p:cNvSpPr/>
-          <p:nvPr/>
-        </p:nvSpPr>
-        <p:spPr>
-          <a:xfrm>
-            <a:off x="1463040" y="3566160"/>
-            <a:ext cx="6858000" cy="914400"/>
+          <p:cNvPr id="6" name="Text 3"/>
+          <p:cNvSpPr/>
+          <p:nvPr/>
+        </p:nvSpPr>
+        <p:spPr>
+          <a:xfrm>
+            <a:off x="822960" y="2679192"/>
+            <a:ext cx="2011680" cy="411480"/>
           </a:xfrm>
           <a:prstGeom prst="rect">
             <a:avLst/>
@@ -7730,22 +7074,418 @@
           <a:bodyPr wrap="square" lIns="0" tIns="0" rIns="0" bIns="0" rtlCol="0" anchor="ctr"/>
           <a:lstStyle/>
           <a:p>
-            <a:pPr indent="0" marL="0">
+            <a:pPr algn="l" indent="0" marL="0">
+              <a:buNone/>
+            </a:pPr>
+            <a:r>
+              <a:rPr lang="en-US" sz="1700" b="1" dirty="0">
+                <a:solidFill>
+                  <a:srgbClr val="1F2430"/>
+                </a:solidFill>
+                <a:latin typeface="Cambria" pitchFamily="34" charset="0"/>
+                <a:ea typeface="Cambria" pitchFamily="34" charset="-122"/>
+                <a:cs typeface="Cambria" pitchFamily="34" charset="-120"/>
+              </a:rPr>
+              <a:t>Grounded in the source</a:t>
+            </a:r>
+            <a:endParaRPr lang="en-US" sz="1700" dirty="0"/>
+          </a:p>
+        </p:txBody>
+      </p:sp>
+      <p:sp>
+        <p:nvSpPr>
+          <p:cNvPr id="7" name="Text 4"/>
+          <p:cNvSpPr/>
+          <p:nvPr/>
+        </p:nvSpPr>
+        <p:spPr>
+          <a:xfrm>
+            <a:off x="822960" y="3081528"/>
+            <a:ext cx="2057400" cy="731520"/>
+          </a:xfrm>
+          <a:prstGeom prst="rect">
+            <a:avLst/>
+          </a:prstGeom>
+          <a:noFill/>
+          <a:ln/>
+        </p:spPr>
+        <p:txBody>
+          <a:bodyPr wrap="square" lIns="0" tIns="0" rIns="0" bIns="0" rtlCol="0" anchor="t"/>
+          <a:lstStyle/>
+          <a:p>
+            <a:pPr algn="l" indent="0" marL="0">
               <a:lnSpc>
-                <a:spcPct val="106000"/>
+                <a:spcPct val="105000"/>
               </a:lnSpc>
               <a:buNone/>
             </a:pPr>
             <a:r>
-              <a:rPr lang="en-US" sz="1350" dirty="0">
-                <a:solidFill>
-                  <a:srgbClr val="1F2430"/>
+              <a:rPr lang="en-US" sz="1250" dirty="0">
+                <a:solidFill>
+                  <a:srgbClr val="64708A"/>
                 </a:solidFill>
                 <a:latin typeface="Calibri" pitchFamily="34" charset="0"/>
                 <a:ea typeface="Calibri" pitchFamily="34" charset="-122"/>
                 <a:cs typeface="Calibri" pitchFamily="34" charset="-120"/>
               </a:rPr>
-              <a:t>For each question, the order isn't fixed. The Supervisor may re-read a blurry scan, re-verify a step, skip reflection, or stop early — chosen from what it observes. That is what makes it an agent, not a workflow.</a:t>
+              <a:t>Retrieves the official solution and rubric, so grades follow the material — not invention.</a:t>
+            </a:r>
+            <a:endParaRPr lang="en-US" sz="1250" dirty="0"/>
+          </a:p>
+        </p:txBody>
+      </p:sp>
+      <p:sp>
+        <p:nvSpPr>
+          <p:cNvPr id="8" name="Shape 5"/>
+          <p:cNvSpPr/>
+          <p:nvPr/>
+        </p:nvSpPr>
+        <p:spPr>
+          <a:xfrm>
+            <a:off x="3291840" y="1600200"/>
+            <a:ext cx="2560320" cy="2286000"/>
+          </a:xfrm>
+          <a:prstGeom prst="roundRect">
+            <a:avLst>
+              <a:gd name="adj" fmla="val 3600"/>
+            </a:avLst>
+          </a:prstGeom>
+          <a:solidFill>
+            <a:srgbClr val="FFFFFF"/>
+          </a:solidFill>
+          <a:ln w="12700">
+            <a:solidFill>
+              <a:srgbClr val="E4E6F2"/>
+            </a:solidFill>
+            <a:prstDash val="solid"/>
+          </a:ln>
+          <a:effectLst>
+            <a:outerShdw sx="100000" sy="100000" kx="0" ky="0" algn="bl" rotWithShape="0" blurRad="88900" dist="38100" dir="5400000">
+              <a:srgbClr val="000000">
+                <a:alpha val="16000"/>
+              </a:srgbClr>
+            </a:outerShdw>
+          </a:effectLst>
+        </p:spPr>
+      </p:sp>
+      <p:sp>
+        <p:nvSpPr>
+          <p:cNvPr id="9" name="Shape 6"/>
+          <p:cNvSpPr/>
+          <p:nvPr/>
+        </p:nvSpPr>
+        <p:spPr>
+          <a:xfrm>
+            <a:off x="3566160" y="1874520"/>
+            <a:ext cx="658368" cy="658368"/>
+          </a:xfrm>
+          <a:prstGeom prst="ellipse">
+            <a:avLst/>
+          </a:prstGeom>
+          <a:solidFill>
+            <a:srgbClr val="534AB7"/>
+          </a:solidFill>
+          <a:ln/>
+        </p:spPr>
+      </p:sp>
+      <p:pic>
+        <p:nvPicPr>
+          <p:cNvPr id="10" name="Image 1" descr="preencoded.png"/>
+          <p:cNvPicPr>
+            <a:picLocks noChangeAspect="1"/>
+          </p:cNvPicPr>
+          <p:nvPr/>
+        </p:nvPicPr>
+        <p:blipFill>
+          <a:blip r:embed="rId2"/>
+          <a:stretch>
+            <a:fillRect/>
+          </a:stretch>
+        </p:blipFill>
+        <p:spPr>
+          <a:xfrm>
+            <a:off x="3730752" y="2039112"/>
+            <a:ext cx="329184" cy="329184"/>
+          </a:xfrm>
+          <a:prstGeom prst="rect">
+            <a:avLst/>
+          </a:prstGeom>
+        </p:spPr>
+      </p:pic>
+      <p:sp>
+        <p:nvSpPr>
+          <p:cNvPr id="11" name="Text 7"/>
+          <p:cNvSpPr/>
+          <p:nvPr/>
+        </p:nvSpPr>
+        <p:spPr>
+          <a:xfrm>
+            <a:off x="3566160" y="2679192"/>
+            <a:ext cx="2011680" cy="411480"/>
+          </a:xfrm>
+          <a:prstGeom prst="rect">
+            <a:avLst/>
+          </a:prstGeom>
+          <a:noFill/>
+          <a:ln/>
+        </p:spPr>
+        <p:txBody>
+          <a:bodyPr wrap="square" lIns="0" tIns="0" rIns="0" bIns="0" rtlCol="0" anchor="ctr"/>
+          <a:lstStyle/>
+          <a:p>
+            <a:pPr algn="l" indent="0" marL="0">
+              <a:buNone/>
+            </a:pPr>
+            <a:r>
+              <a:rPr lang="en-US" sz="1700" b="1" dirty="0">
+                <a:solidFill>
+                  <a:srgbClr val="1F2430"/>
+                </a:solidFill>
+                <a:latin typeface="Cambria" pitchFamily="34" charset="0"/>
+                <a:ea typeface="Cambria" pitchFamily="34" charset="-122"/>
+                <a:cs typeface="Cambria" pitchFamily="34" charset="-120"/>
+              </a:rPr>
+              <a:t>Checks its own grade</a:t>
+            </a:r>
+            <a:endParaRPr lang="en-US" sz="1700" dirty="0"/>
+          </a:p>
+        </p:txBody>
+      </p:sp>
+      <p:sp>
+        <p:nvSpPr>
+          <p:cNvPr id="12" name="Text 8"/>
+          <p:cNvSpPr/>
+          <p:nvPr/>
+        </p:nvSpPr>
+        <p:spPr>
+          <a:xfrm>
+            <a:off x="3566160" y="3081528"/>
+            <a:ext cx="2057400" cy="731520"/>
+          </a:xfrm>
+          <a:prstGeom prst="rect">
+            <a:avLst/>
+          </a:prstGeom>
+          <a:noFill/>
+          <a:ln/>
+        </p:spPr>
+        <p:txBody>
+          <a:bodyPr wrap="square" lIns="0" tIns="0" rIns="0" bIns="0" rtlCol="0" anchor="t"/>
+          <a:lstStyle/>
+          <a:p>
+            <a:pPr algn="l" indent="0" marL="0">
+              <a:lnSpc>
+                <a:spcPct val="105000"/>
+              </a:lnSpc>
+              <a:buNone/>
+            </a:pPr>
+            <a:r>
+              <a:rPr lang="en-US" sz="1250" dirty="0">
+                <a:solidFill>
+                  <a:srgbClr val="64708A"/>
+                </a:solidFill>
+                <a:latin typeface="Calibri" pitchFamily="34" charset="0"/>
+                <a:ea typeface="Calibri" pitchFamily="34" charset="-122"/>
+                <a:cs typeface="Calibri" pitchFamily="34" charset="-120"/>
+              </a:rPr>
+              <a:t>When a grade looks shaky, it critiques and fixes it once before returning.</a:t>
+            </a:r>
+            <a:endParaRPr lang="en-US" sz="1250" dirty="0"/>
+          </a:p>
+        </p:txBody>
+      </p:sp>
+      <p:sp>
+        <p:nvSpPr>
+          <p:cNvPr id="13" name="Shape 9"/>
+          <p:cNvSpPr/>
+          <p:nvPr/>
+        </p:nvSpPr>
+        <p:spPr>
+          <a:xfrm>
+            <a:off x="6035040" y="1600200"/>
+            <a:ext cx="2560320" cy="2286000"/>
+          </a:xfrm>
+          <a:prstGeom prst="roundRect">
+            <a:avLst>
+              <a:gd name="adj" fmla="val 3600"/>
+            </a:avLst>
+          </a:prstGeom>
+          <a:solidFill>
+            <a:srgbClr val="FFFFFF"/>
+          </a:solidFill>
+          <a:ln w="12700">
+            <a:solidFill>
+              <a:srgbClr val="E4E6F2"/>
+            </a:solidFill>
+            <a:prstDash val="solid"/>
+          </a:ln>
+          <a:effectLst>
+            <a:outerShdw sx="100000" sy="100000" kx="0" ky="0" algn="bl" rotWithShape="0" blurRad="88900" dist="38100" dir="5400000">
+              <a:srgbClr val="000000">
+                <a:alpha val="16000"/>
+              </a:srgbClr>
+            </a:outerShdw>
+          </a:effectLst>
+        </p:spPr>
+      </p:sp>
+      <p:sp>
+        <p:nvSpPr>
+          <p:cNvPr id="14" name="Shape 10"/>
+          <p:cNvSpPr/>
+          <p:nvPr/>
+        </p:nvSpPr>
+        <p:spPr>
+          <a:xfrm>
+            <a:off x="6309360" y="1874520"/>
+            <a:ext cx="658368" cy="658368"/>
+          </a:xfrm>
+          <a:prstGeom prst="ellipse">
+            <a:avLst/>
+          </a:prstGeom>
+          <a:solidFill>
+            <a:srgbClr val="BA7517"/>
+          </a:solidFill>
+          <a:ln/>
+        </p:spPr>
+      </p:sp>
+      <p:pic>
+        <p:nvPicPr>
+          <p:cNvPr id="15" name="Image 2" descr="preencoded.png"/>
+          <p:cNvPicPr>
+            <a:picLocks noChangeAspect="1"/>
+          </p:cNvPicPr>
+          <p:nvPr/>
+        </p:nvPicPr>
+        <p:blipFill>
+          <a:blip r:embed="rId3"/>
+          <a:stretch>
+            <a:fillRect/>
+          </a:stretch>
+        </p:blipFill>
+        <p:spPr>
+          <a:xfrm>
+            <a:off x="6473952" y="2039112"/>
+            <a:ext cx="329184" cy="329184"/>
+          </a:xfrm>
+          <a:prstGeom prst="rect">
+            <a:avLst/>
+          </a:prstGeom>
+        </p:spPr>
+      </p:pic>
+      <p:sp>
+        <p:nvSpPr>
+          <p:cNvPr id="16" name="Text 11"/>
+          <p:cNvSpPr/>
+          <p:nvPr/>
+        </p:nvSpPr>
+        <p:spPr>
+          <a:xfrm>
+            <a:off x="6309360" y="2679192"/>
+            <a:ext cx="2011680" cy="411480"/>
+          </a:xfrm>
+          <a:prstGeom prst="rect">
+            <a:avLst/>
+          </a:prstGeom>
+          <a:noFill/>
+          <a:ln/>
+        </p:spPr>
+        <p:txBody>
+          <a:bodyPr wrap="square" lIns="0" tIns="0" rIns="0" bIns="0" rtlCol="0" anchor="ctr"/>
+          <a:lstStyle/>
+          <a:p>
+            <a:pPr algn="l" indent="0" marL="0">
+              <a:buNone/>
+            </a:pPr>
+            <a:r>
+              <a:rPr lang="en-US" sz="1700" b="1" dirty="0">
+                <a:solidFill>
+                  <a:srgbClr val="1F2430"/>
+                </a:solidFill>
+                <a:latin typeface="Cambria" pitchFamily="34" charset="0"/>
+                <a:ea typeface="Cambria" pitchFamily="34" charset="-122"/>
+                <a:cs typeface="Cambria" pitchFamily="34" charset="-120"/>
+              </a:rPr>
+              <a:t>Escalates when unsure</a:t>
+            </a:r>
+            <a:endParaRPr lang="en-US" sz="1700" dirty="0"/>
+          </a:p>
+        </p:txBody>
+      </p:sp>
+      <p:sp>
+        <p:nvSpPr>
+          <p:cNvPr id="17" name="Text 12"/>
+          <p:cNvSpPr/>
+          <p:nvPr/>
+        </p:nvSpPr>
+        <p:spPr>
+          <a:xfrm>
+            <a:off x="6309360" y="3081528"/>
+            <a:ext cx="2057400" cy="731520"/>
+          </a:xfrm>
+          <a:prstGeom prst="rect">
+            <a:avLst/>
+          </a:prstGeom>
+          <a:noFill/>
+          <a:ln/>
+        </p:spPr>
+        <p:txBody>
+          <a:bodyPr wrap="square" lIns="0" tIns="0" rIns="0" bIns="0" rtlCol="0" anchor="t"/>
+          <a:lstStyle/>
+          <a:p>
+            <a:pPr algn="l" indent="0" marL="0">
+              <a:lnSpc>
+                <a:spcPct val="105000"/>
+              </a:lnSpc>
+              <a:buNone/>
+            </a:pPr>
+            <a:r>
+              <a:rPr lang="en-US" sz="1250" dirty="0">
+                <a:solidFill>
+                  <a:srgbClr val="64708A"/>
+                </a:solidFill>
+                <a:latin typeface="Calibri" pitchFamily="34" charset="0"/>
+                <a:ea typeface="Calibri" pitchFamily="34" charset="-122"/>
+                <a:cs typeface="Calibri" pitchFamily="34" charset="-120"/>
+              </a:rPr>
+              <a:t>Low-confidence or unclear answers go to the teacher, never guessed.</a:t>
+            </a:r>
+            <a:endParaRPr lang="en-US" sz="1250" dirty="0"/>
+          </a:p>
+        </p:txBody>
+      </p:sp>
+      <p:sp>
+        <p:nvSpPr>
+          <p:cNvPr id="18" name="Text 13"/>
+          <p:cNvSpPr/>
+          <p:nvPr/>
+        </p:nvSpPr>
+        <p:spPr>
+          <a:xfrm>
+            <a:off x="548640" y="4114800"/>
+            <a:ext cx="8138160" cy="457200"/>
+          </a:xfrm>
+          <a:prstGeom prst="rect">
+            <a:avLst/>
+          </a:prstGeom>
+          <a:noFill/>
+          <a:ln/>
+        </p:spPr>
+        <p:txBody>
+          <a:bodyPr wrap="square" lIns="0" tIns="0" rIns="0" bIns="0" rtlCol="0" anchor="ctr"/>
+          <a:lstStyle/>
+          <a:p>
+            <a:pPr indent="0" marL="0">
+              <a:buNone/>
+            </a:pPr>
+            <a:r>
+              <a:rPr lang="en-US" sz="1350" b="1" dirty="0">
+                <a:solidFill>
+                  <a:srgbClr val="1D8F73"/>
+                </a:solidFill>
+                <a:latin typeface="Calibri" pitchFamily="34" charset="0"/>
+                <a:ea typeface="Calibri" pitchFamily="34" charset="-122"/>
+                <a:cs typeface="Calibri" pitchFamily="34" charset="-120"/>
+              </a:rPr>
+              <a:t>Runs on gpt-5.4-mini within the $13 budget — the agent checks its own grade and questions grade in parallel.</a:t>
             </a:r>
             <a:endParaRPr lang="en-US" sz="1350" dirty="0"/>
           </a:p>
@@ -7816,7 +7556,7 @@
                 <a:ea typeface="Cambria" pitchFamily="34" charset="-122"/>
                 <a:cs typeface="Cambria" pitchFamily="34" charset="-120"/>
               </a:rPr>
-              <a:t>Accurate, honest, and cheap to run</a:t>
+              <a:t>See CheckMate work: the interface</a:t>
             </a:r>
             <a:endParaRPr lang="en-US" sz="3000" dirty="0"/>
           </a:p>
@@ -7824,24 +7564,63 @@
       </p:sp>
       <p:sp>
         <p:nvSpPr>
-          <p:cNvPr id="3" name="Shape 1"/>
-          <p:cNvSpPr/>
-          <p:nvPr/>
-        </p:nvSpPr>
-        <p:spPr>
-          <a:xfrm>
-            <a:off x="548640" y="1600200"/>
-            <a:ext cx="2560320" cy="2514600"/>
+          <p:cNvPr id="3" name="Text 1"/>
+          <p:cNvSpPr/>
+          <p:nvPr/>
+        </p:nvSpPr>
+        <p:spPr>
+          <a:xfrm>
+            <a:off x="548640" y="1024128"/>
+            <a:ext cx="8046720" cy="320040"/>
+          </a:xfrm>
+          <a:prstGeom prst="rect">
+            <a:avLst/>
+          </a:prstGeom>
+          <a:noFill/>
+          <a:ln/>
+        </p:spPr>
+        <p:txBody>
+          <a:bodyPr wrap="square" lIns="0" tIns="0" rIns="0" bIns="0" rtlCol="0" anchor="ctr"/>
+          <a:lstStyle/>
+          <a:p>
+            <a:pPr indent="0" marL="0">
+              <a:buNone/>
+            </a:pPr>
+            <a:r>
+              <a:rPr lang="en-US" sz="1400" i="1" dirty="0">
+                <a:solidFill>
+                  <a:srgbClr val="64708A"/>
+                </a:solidFill>
+                <a:latin typeface="Calibri" pitchFamily="34" charset="0"/>
+                <a:ea typeface="Calibri" pitchFamily="34" charset="-122"/>
+                <a:cs typeface="Calibri" pitchFamily="34" charset="-120"/>
+              </a:rPr>
+              <a:t>Upload an exam, get the grade and feedback, and inspect every step.</a:t>
+            </a:r>
+            <a:endParaRPr lang="en-US" sz="1400" dirty="0"/>
+          </a:p>
+        </p:txBody>
+      </p:sp>
+      <p:sp>
+        <p:nvSpPr>
+          <p:cNvPr id="4" name="Shape 2"/>
+          <p:cNvSpPr/>
+          <p:nvPr/>
+        </p:nvSpPr>
+        <p:spPr>
+          <a:xfrm>
+            <a:off x="731520" y="1554480"/>
+            <a:ext cx="7680960" cy="3017520"/>
           </a:xfrm>
           <a:prstGeom prst="roundRect">
             <a:avLst>
-              <a:gd name="adj" fmla="val 3273"/>
+              <a:gd name="adj" fmla="val 3030"/>
             </a:avLst>
           </a:prstGeom>
           <a:solidFill>
             <a:srgbClr val="FFFFFF"/>
           </a:solidFill>
-          <a:ln w="12700">
+          <a:ln w="15875">
             <a:solidFill>
               <a:srgbClr val="E4E6F2"/>
             </a:solidFill>
@@ -7858,27 +7637,115 @@
       </p:sp>
       <p:sp>
         <p:nvSpPr>
-          <p:cNvPr id="4" name="Shape 2"/>
-          <p:cNvSpPr/>
-          <p:nvPr/>
-        </p:nvSpPr>
-        <p:spPr>
-          <a:xfrm>
-            <a:off x="822960" y="1874520"/>
-            <a:ext cx="658368" cy="658368"/>
+          <p:cNvPr id="5" name="Shape 3"/>
+          <p:cNvSpPr/>
+          <p:nvPr/>
+        </p:nvSpPr>
+        <p:spPr>
+          <a:xfrm>
+            <a:off x="731520" y="1554480"/>
+            <a:ext cx="7680960" cy="457200"/>
+          </a:xfrm>
+          <a:prstGeom prst="roundRect">
+            <a:avLst>
+              <a:gd name="adj" fmla="val 20000"/>
+            </a:avLst>
+          </a:prstGeom>
+          <a:solidFill>
+            <a:srgbClr val="534AB7"/>
+          </a:solidFill>
+          <a:ln/>
+        </p:spPr>
+      </p:sp>
+      <p:sp>
+        <p:nvSpPr>
+          <p:cNvPr id="6" name="Text 4"/>
+          <p:cNvSpPr/>
+          <p:nvPr/>
+        </p:nvSpPr>
+        <p:spPr>
+          <a:xfrm>
+            <a:off x="960120" y="1554480"/>
+            <a:ext cx="2743200" cy="457200"/>
+          </a:xfrm>
+          <a:prstGeom prst="rect">
+            <a:avLst/>
+          </a:prstGeom>
+          <a:noFill/>
+          <a:ln/>
+        </p:spPr>
+        <p:txBody>
+          <a:bodyPr wrap="square" lIns="0" tIns="0" rIns="0" bIns="0" rtlCol="0" anchor="ctr"/>
+          <a:lstStyle/>
+          <a:p>
+            <a:pPr indent="0" marL="0">
+              <a:buNone/>
+            </a:pPr>
+            <a:r>
+              <a:rPr lang="en-US" sz="1400" b="1" dirty="0">
+                <a:solidFill>
+                  <a:srgbClr val="FFFFFF"/>
+                </a:solidFill>
+                <a:latin typeface="Cambria" pitchFamily="34" charset="0"/>
+                <a:ea typeface="Cambria" pitchFamily="34" charset="-122"/>
+                <a:cs typeface="Cambria" pitchFamily="34" charset="-120"/>
+              </a:rPr>
+              <a:t>CheckMate</a:t>
+            </a:r>
+            <a:endParaRPr lang="en-US" sz="1400" dirty="0"/>
+          </a:p>
+        </p:txBody>
+      </p:sp>
+      <p:sp>
+        <p:nvSpPr>
+          <p:cNvPr id="7" name="Shape 5"/>
+          <p:cNvSpPr/>
+          <p:nvPr/>
+        </p:nvSpPr>
+        <p:spPr>
+          <a:xfrm>
+            <a:off x="1005840" y="2240280"/>
+            <a:ext cx="3200400" cy="1417320"/>
+          </a:xfrm>
+          <a:prstGeom prst="roundRect">
+            <a:avLst>
+              <a:gd name="adj" fmla="val 5161"/>
+            </a:avLst>
+          </a:prstGeom>
+          <a:solidFill>
+            <a:srgbClr val="F3F4FB"/>
+          </a:solidFill>
+          <a:ln w="12700">
+            <a:solidFill>
+              <a:srgbClr val="C7CBE8"/>
+            </a:solidFill>
+            <a:prstDash val="dash"/>
+          </a:ln>
+        </p:spPr>
+      </p:sp>
+      <p:sp>
+        <p:nvSpPr>
+          <p:cNvPr id="8" name="Shape 6"/>
+          <p:cNvSpPr/>
+          <p:nvPr/>
+        </p:nvSpPr>
+        <p:spPr>
+          <a:xfrm>
+            <a:off x="2331720" y="2487168"/>
+            <a:ext cx="548640" cy="548640"/>
           </a:xfrm>
           <a:prstGeom prst="ellipse">
             <a:avLst/>
           </a:prstGeom>
           <a:solidFill>
-            <a:srgbClr val="1D8F73"/>
+            <a:srgbClr val="534AB7"/>
           </a:solidFill>
           <a:ln/>
         </p:spPr>
       </p:sp>
       <p:pic>
         <p:nvPicPr>
-          <p:cNvPr id="5" name="Image 0" descr="preencoded.png">    </p:cNvPr>
+          <p:cNvPr id="9" name="Image 0" descr="preencoded.png"/>
           <p:cNvPicPr>
             <a:picLocks noChangeAspect="1"/>
           </p:cNvPicPr>
@@ -7892,8 +7759,8 @@
         </p:blipFill>
         <p:spPr>
           <a:xfrm>
-            <a:off x="987552" y="2039112"/>
-            <a:ext cx="329184" cy="329184"/>
+            <a:off x="2468880" y="2624328"/>
+            <a:ext cx="274320" cy="274320"/>
           </a:xfrm>
           <a:prstGeom prst="rect">
             <a:avLst/>
@@ -7902,14 +7769,14 @@
       </p:pic>
       <p:sp>
         <p:nvSpPr>
-          <p:cNvPr id="6" name="Text 3"/>
-          <p:cNvSpPr/>
-          <p:nvPr/>
-        </p:nvSpPr>
-        <p:spPr>
-          <a:xfrm>
-            <a:off x="822960" y="2679192"/>
-            <a:ext cx="2011680" cy="411480"/>
+          <p:cNvPr id="10" name="Text 7"/>
+          <p:cNvSpPr/>
+          <p:nvPr/>
+        </p:nvSpPr>
+        <p:spPr>
+          <a:xfrm>
+            <a:off x="1097280" y="3154680"/>
+            <a:ext cx="3017520" cy="365760"/>
           </a:xfrm>
           <a:prstGeom prst="rect">
             <a:avLst/>
@@ -7921,53 +7788,11 @@
           <a:bodyPr wrap="square" lIns="0" tIns="0" rIns="0" bIns="0" rtlCol="0" anchor="ctr"/>
           <a:lstStyle/>
           <a:p>
-            <a:pPr algn="l" indent="0" marL="0">
-              <a:buNone/>
-            </a:pPr>
-            <a:r>
-              <a:rPr lang="en-US" sz="1700" b="1" dirty="0">
-                <a:solidFill>
-                  <a:srgbClr val="1F2430"/>
-                </a:solidFill>
-                <a:latin typeface="Cambria" pitchFamily="34" charset="0"/>
-                <a:ea typeface="Cambria" pitchFamily="34" charset="-122"/>
-                <a:cs typeface="Cambria" pitchFamily="34" charset="-120"/>
-              </a:rPr>
-              <a:t>Math checked by code</a:t>
-            </a:r>
-            <a:endParaRPr lang="en-US" sz="1700" dirty="0"/>
-          </a:p>
-        </p:txBody>
-      </p:sp>
-      <p:sp>
-        <p:nvSpPr>
-          <p:cNvPr id="7" name="Text 4"/>
-          <p:cNvSpPr/>
-          <p:nvPr/>
-        </p:nvSpPr>
-        <p:spPr>
-          <a:xfrm>
-            <a:off x="822960" y="3081528"/>
-            <a:ext cx="2057400" cy="960120"/>
-          </a:xfrm>
-          <a:prstGeom prst="rect">
-            <a:avLst/>
-          </a:prstGeom>
-          <a:noFill/>
-          <a:ln/>
-        </p:spPr>
-        <p:txBody>
-          <a:bodyPr wrap="square" lIns="0" tIns="0" rIns="0" bIns="0" rtlCol="0" anchor="t"/>
-          <a:lstStyle/>
-          <a:p>
-            <a:pPr algn="l" indent="0" marL="0">
-              <a:lnSpc>
-                <a:spcPct val="105000"/>
-              </a:lnSpc>
-              <a:buNone/>
-            </a:pPr>
-            <a:r>
-              <a:rPr lang="en-US" sz="1250" dirty="0">
+            <a:pPr algn="ctr" indent="0" marL="0">
+              <a:buNone/>
+            </a:pPr>
+            <a:r>
+              <a:rPr lang="en-US" sz="1200" dirty="0">
                 <a:solidFill>
                   <a:srgbClr val="64708A"/>
                 </a:solidFill>
@@ -7975,30 +7800,91 @@
                 <a:ea typeface="Calibri" pitchFamily="34" charset="-122"/>
                 <a:cs typeface="Calibri" pitchFamily="34" charset="-120"/>
               </a:rPr>
-              <a:t>Derivatives, integrals and limits are verified with SymPy — deterministically, not guessed by an LLM.</a:t>
-            </a:r>
-            <a:endParaRPr lang="en-US" sz="1250" dirty="0"/>
-          </a:p>
-        </p:txBody>
-      </p:sp>
-      <p:sp>
-        <p:nvSpPr>
-          <p:cNvPr id="8" name="Shape 5"/>
-          <p:cNvSpPr/>
-          <p:nvPr/>
-        </p:nvSpPr>
-        <p:spPr>
-          <a:xfrm>
-            <a:off x="3291840" y="1600200"/>
-            <a:ext cx="2560320" cy="2514600"/>
+              <a:t>Drop exam scan  (PDF / images)</a:t>
+            </a:r>
+            <a:endParaRPr lang="en-US" sz="1200" dirty="0"/>
+          </a:p>
+        </p:txBody>
+      </p:sp>
+      <p:sp>
+        <p:nvSpPr>
+          <p:cNvPr id="11" name="Shape 8"/>
+          <p:cNvSpPr/>
+          <p:nvPr/>
+        </p:nvSpPr>
+        <p:spPr>
+          <a:xfrm>
+            <a:off x="1874520" y="3840480"/>
+            <a:ext cx="1463040" cy="384048"/>
           </a:xfrm>
           <a:prstGeom prst="roundRect">
             <a:avLst>
-              <a:gd name="adj" fmla="val 3273"/>
+              <a:gd name="adj" fmla="val 50000"/>
             </a:avLst>
           </a:prstGeom>
           <a:solidFill>
-            <a:srgbClr val="FFFFFF"/>
+            <a:srgbClr val="534AB7"/>
+          </a:solidFill>
+          <a:ln/>
+        </p:spPr>
+      </p:sp>
+      <p:sp>
+        <p:nvSpPr>
+          <p:cNvPr id="12" name="Text 9"/>
+          <p:cNvSpPr/>
+          <p:nvPr/>
+        </p:nvSpPr>
+        <p:spPr>
+          <a:xfrm>
+            <a:off x="1874520" y="3840480"/>
+            <a:ext cx="1463040" cy="384048"/>
+          </a:xfrm>
+          <a:prstGeom prst="rect">
+            <a:avLst/>
+          </a:prstGeom>
+          <a:noFill/>
+          <a:ln/>
+        </p:spPr>
+        <p:txBody>
+          <a:bodyPr wrap="square" lIns="0" tIns="0" rIns="0" bIns="0" rtlCol="0" anchor="ctr"/>
+          <a:lstStyle/>
+          <a:p>
+            <a:pPr algn="ctr" indent="0" marL="0">
+              <a:buNone/>
+            </a:pPr>
+            <a:r>
+              <a:rPr lang="en-US" sz="1200" b="1" dirty="0">
+                <a:solidFill>
+                  <a:srgbClr val="FFFFFF"/>
+                </a:solidFill>
+                <a:latin typeface="Calibri" pitchFamily="34" charset="0"/>
+                <a:ea typeface="Calibri" pitchFamily="34" charset="-122"/>
+                <a:cs typeface="Calibri" pitchFamily="34" charset="-120"/>
+              </a:rPr>
+              <a:t>Grade exam</a:t>
+            </a:r>
+            <a:endParaRPr lang="en-US" sz="1200" dirty="0"/>
+          </a:p>
+        </p:txBody>
+      </p:sp>
+      <p:sp>
+        <p:nvSpPr>
+          <p:cNvPr id="13" name="Shape 10"/>
+          <p:cNvSpPr/>
+          <p:nvPr/>
+        </p:nvSpPr>
+        <p:spPr>
+          <a:xfrm>
+            <a:off x="4480560" y="2240280"/>
+            <a:ext cx="3657600" cy="2103120"/>
+          </a:xfrm>
+          <a:prstGeom prst="roundRect">
+            <a:avLst>
+              <a:gd name="adj" fmla="val 3478"/>
+            </a:avLst>
+          </a:prstGeom>
+          <a:solidFill>
+            <a:srgbClr val="FBFBFE"/>
           </a:solidFill>
           <a:ln w="12700">
             <a:solidFill>
@@ -8006,69 +7892,18 @@
             </a:solidFill>
             <a:prstDash val="solid"/>
           </a:ln>
-          <a:effectLst>
-            <a:outerShdw sx="100000" sy="100000" kx="0" ky="0" algn="bl" rotWithShape="0" blurRad="88900" dist="38100" dir="5400000">
-              <a:srgbClr val="000000">
-                <a:alpha val="16000"/>
-              </a:srgbClr>
-            </a:outerShdw>
-          </a:effectLst>
-        </p:spPr>
-      </p:sp>
-      <p:sp>
-        <p:nvSpPr>
-          <p:cNvPr id="9" name="Shape 6"/>
-          <p:cNvSpPr/>
-          <p:nvPr/>
-        </p:nvSpPr>
-        <p:spPr>
-          <a:xfrm>
-            <a:off x="3566160" y="1874520"/>
-            <a:ext cx="658368" cy="658368"/>
-          </a:xfrm>
-          <a:prstGeom prst="ellipse">
-            <a:avLst/>
-          </a:prstGeom>
-          <a:solidFill>
-            <a:srgbClr val="534AB7"/>
-          </a:solidFill>
-          <a:ln/>
-        </p:spPr>
-      </p:sp>
-      <p:pic>
-        <p:nvPicPr>
-          <p:cNvPr id="10" name="Image 1" descr="preencoded.png">    </p:cNvPr>
-          <p:cNvPicPr>
-            <a:picLocks noChangeAspect="1"/>
-          </p:cNvPicPr>
-          <p:nvPr/>
-        </p:nvPicPr>
-        <p:blipFill>
-          <a:blip r:embed="rId2"/>
-          <a:stretch>
-            <a:fillRect/>
-          </a:stretch>
-        </p:blipFill>
-        <p:spPr>
-          <a:xfrm>
-            <a:off x="3730752" y="2039112"/>
-            <a:ext cx="329184" cy="329184"/>
-          </a:xfrm>
-          <a:prstGeom prst="rect">
-            <a:avLst/>
-          </a:prstGeom>
-        </p:spPr>
-      </p:pic>
-      <p:sp>
-        <p:nvSpPr>
-          <p:cNvPr id="11" name="Text 7"/>
-          <p:cNvSpPr/>
-          <p:nvPr/>
-        </p:nvSpPr>
-        <p:spPr>
-          <a:xfrm>
-            <a:off x="3566160" y="2679192"/>
-            <a:ext cx="2011680" cy="411480"/>
+        </p:spPr>
+      </p:sp>
+      <p:sp>
+        <p:nvSpPr>
+          <p:cNvPr id="14" name="Text 11"/>
+          <p:cNvSpPr/>
+          <p:nvPr/>
+        </p:nvSpPr>
+        <p:spPr>
+          <a:xfrm>
+            <a:off x="4663440" y="2331720"/>
+            <a:ext cx="3291840" cy="274320"/>
           </a:xfrm>
           <a:prstGeom prst="rect">
             <a:avLst/>
@@ -8080,220 +7915,205 @@
           <a:bodyPr wrap="square" lIns="0" tIns="0" rIns="0" bIns="0" rtlCol="0" anchor="ctr"/>
           <a:lstStyle/>
           <a:p>
-            <a:pPr algn="l" indent="0" marL="0">
-              <a:buNone/>
-            </a:pPr>
-            <a:r>
-              <a:rPr lang="en-US" sz="1700" b="1" dirty="0">
-                <a:solidFill>
-                  <a:srgbClr val="1F2430"/>
+            <a:pPr indent="0" marL="0">
+              <a:buNone/>
+            </a:pPr>
+            <a:r>
+              <a:rPr lang="en-US" sz="1200" b="1" dirty="0">
+                <a:solidFill>
+                  <a:srgbClr val="64708A"/>
+                </a:solidFill>
+                <a:latin typeface="Calibri" pitchFamily="34" charset="0"/>
+                <a:ea typeface="Calibri" pitchFamily="34" charset="-122"/>
+                <a:cs typeface="Calibri" pitchFamily="34" charset="-120"/>
+              </a:rPr>
+              <a:t>Result</a:t>
+            </a:r>
+            <a:endParaRPr lang="en-US" sz="1200" dirty="0"/>
+          </a:p>
+        </p:txBody>
+      </p:sp>
+      <p:sp>
+        <p:nvSpPr>
+          <p:cNvPr id="15" name="Text 12"/>
+          <p:cNvSpPr/>
+          <p:nvPr/>
+        </p:nvSpPr>
+        <p:spPr>
+          <a:xfrm>
+            <a:off x="4663440" y="2606040"/>
+            <a:ext cx="3291840" cy="502920"/>
+          </a:xfrm>
+          <a:prstGeom prst="rect">
+            <a:avLst/>
+          </a:prstGeom>
+          <a:noFill/>
+          <a:ln/>
+        </p:spPr>
+        <p:txBody>
+          <a:bodyPr wrap="square" lIns="0" tIns="0" rIns="0" bIns="0" rtlCol="0" anchor="ctr"/>
+          <a:lstStyle/>
+          <a:p>
+            <a:pPr indent="0" marL="0">
+              <a:buNone/>
+            </a:pPr>
+            <a:r>
+              <a:rPr lang="en-US" sz="3000" b="1" dirty="0">
+                <a:solidFill>
+                  <a:srgbClr val="534AB7"/>
                 </a:solidFill>
                 <a:latin typeface="Cambria" pitchFamily="34" charset="0"/>
                 <a:ea typeface="Cambria" pitchFamily="34" charset="-122"/>
                 <a:cs typeface="Cambria" pitchFamily="34" charset="-120"/>
               </a:rPr>
-              <a:t>Knows when to defer</a:t>
-            </a:r>
-            <a:endParaRPr lang="en-US" sz="1700" dirty="0"/>
-          </a:p>
-        </p:txBody>
-      </p:sp>
-      <p:sp>
-        <p:nvSpPr>
-          <p:cNvPr id="12" name="Text 8"/>
-          <p:cNvSpPr/>
-          <p:nvPr/>
-        </p:nvSpPr>
-        <p:spPr>
-          <a:xfrm>
-            <a:off x="3566160" y="3081528"/>
-            <a:ext cx="2057400" cy="960120"/>
-          </a:xfrm>
-          <a:prstGeom prst="rect">
-            <a:avLst/>
-          </a:prstGeom>
-          <a:noFill/>
-          <a:ln/>
-        </p:spPr>
-        <p:txBody>
-          <a:bodyPr wrap="square" lIns="0" tIns="0" rIns="0" bIns="0" rtlCol="0" anchor="t"/>
-          <a:lstStyle/>
-          <a:p>
-            <a:pPr algn="l" indent="0" marL="0">
+              <a:t>78</a:t>
+            </a:r>
+            <a:pPr indent="0" marL="0">
+              <a:buNone/>
+            </a:pPr>
+            <a:r>
+              <a:rPr lang="en-US" sz="1800" dirty="0">
+                <a:solidFill>
+                  <a:srgbClr val="64708A"/>
+                </a:solidFill>
+                <a:latin typeface="Cambria" pitchFamily="34" charset="0"/>
+                <a:ea typeface="Cambria" pitchFamily="34" charset="-122"/>
+                <a:cs typeface="Cambria" pitchFamily="34" charset="-120"/>
+              </a:rPr>
+              <a:t>  / 100</a:t>
+            </a:r>
+            <a:endParaRPr lang="en-US" sz="3000" dirty="0"/>
+          </a:p>
+        </p:txBody>
+      </p:sp>
+      <p:sp>
+        <p:nvSpPr>
+          <p:cNvPr id="16" name="Text 13"/>
+          <p:cNvSpPr/>
+          <p:nvPr/>
+        </p:nvSpPr>
+        <p:spPr>
+          <a:xfrm>
+            <a:off x="4663440" y="3200400"/>
+            <a:ext cx="3291840" cy="1051560"/>
+          </a:xfrm>
+          <a:prstGeom prst="rect">
+            <a:avLst/>
+          </a:prstGeom>
+          <a:noFill/>
+          <a:ln/>
+        </p:spPr>
+        <p:txBody>
+          <a:bodyPr wrap="square" lIns="0" tIns="0" rIns="0" bIns="0" rtlCol="0" anchor="ctr"/>
+          <a:lstStyle/>
+          <a:p>
+            <a:pPr marL="342900" indent="-342900">
               <a:lnSpc>
-                <a:spcPct val="105000"/>
+                <a:spcPct val="102000"/>
               </a:lnSpc>
-              <a:buNone/>
+              <a:spcAft>
+                <a:spcPts val="500"/>
+              </a:spcAft>
+              <a:buSzPct val="100000"/>
+              <a:buChar char="•"/>
             </a:pPr>
             <a:r>
               <a:rPr lang="en-US" sz="1250" dirty="0">
                 <a:solidFill>
-                  <a:srgbClr val="64708A"/>
+                  <a:srgbClr val="1F2430"/>
                 </a:solidFill>
                 <a:latin typeface="Calibri" pitchFamily="34" charset="0"/>
                 <a:ea typeface="Calibri" pitchFamily="34" charset="-122"/>
                 <a:cs typeface="Calibri" pitchFamily="34" charset="-120"/>
               </a:rPr>
-              <a:t>Genuinely ambiguous handwriting is flagged for human review, never silently guessed.</a:t>
+              <a:t>Q1–Q6 graded with partial credit</a:t>
             </a:r>
             <a:endParaRPr lang="en-US" sz="1250" dirty="0"/>
           </a:p>
-        </p:txBody>
-      </p:sp>
-      <p:sp>
-        <p:nvSpPr>
-          <p:cNvPr id="13" name="Shape 9"/>
-          <p:cNvSpPr/>
-          <p:nvPr/>
-        </p:nvSpPr>
-        <p:spPr>
-          <a:xfrm>
-            <a:off x="6035040" y="1600200"/>
-            <a:ext cx="2560320" cy="2514600"/>
-          </a:xfrm>
-          <a:prstGeom prst="roundRect">
-            <a:avLst>
-              <a:gd name="adj" fmla="val 3273"/>
-            </a:avLst>
-          </a:prstGeom>
-          <a:solidFill>
-            <a:srgbClr val="FFFFFF"/>
-          </a:solidFill>
-          <a:ln w="12700">
-            <a:solidFill>
-              <a:srgbClr val="E4E6F2"/>
-            </a:solidFill>
-            <a:prstDash val="solid"/>
-          </a:ln>
-          <a:effectLst>
-            <a:outerShdw sx="100000" sy="100000" kx="0" ky="0" algn="bl" rotWithShape="0" blurRad="88900" dist="38100" dir="5400000">
-              <a:srgbClr val="000000">
-                <a:alpha val="16000"/>
-              </a:srgbClr>
-            </a:outerShdw>
-          </a:effectLst>
-        </p:spPr>
-      </p:sp>
-      <p:sp>
-        <p:nvSpPr>
-          <p:cNvPr id="14" name="Shape 10"/>
-          <p:cNvSpPr/>
-          <p:nvPr/>
-        </p:nvSpPr>
-        <p:spPr>
-          <a:xfrm>
-            <a:off x="6309360" y="1874520"/>
-            <a:ext cx="658368" cy="658368"/>
-          </a:xfrm>
-          <a:prstGeom prst="ellipse">
-            <a:avLst/>
-          </a:prstGeom>
-          <a:solidFill>
-            <a:srgbClr val="BA7517"/>
-          </a:solidFill>
-          <a:ln/>
-        </p:spPr>
-      </p:sp>
-      <p:pic>
-        <p:nvPicPr>
-          <p:cNvPr id="15" name="Image 2" descr="preencoded.png">    </p:cNvPr>
-          <p:cNvPicPr>
-            <a:picLocks noChangeAspect="1"/>
-          </p:cNvPicPr>
-          <p:nvPr/>
-        </p:nvPicPr>
-        <p:blipFill>
-          <a:blip r:embed="rId3"/>
-          <a:stretch>
-            <a:fillRect/>
-          </a:stretch>
-        </p:blipFill>
-        <p:spPr>
-          <a:xfrm>
-            <a:off x="6473952" y="2039112"/>
-            <a:ext cx="329184" cy="329184"/>
-          </a:xfrm>
-          <a:prstGeom prst="rect">
-            <a:avLst/>
-          </a:prstGeom>
-        </p:spPr>
-      </p:pic>
-      <p:sp>
-        <p:nvSpPr>
-          <p:cNvPr id="16" name="Text 11"/>
-          <p:cNvSpPr/>
-          <p:nvPr/>
-        </p:nvSpPr>
-        <p:spPr>
-          <a:xfrm>
-            <a:off x="6309360" y="2679192"/>
-            <a:ext cx="2011680" cy="411480"/>
-          </a:xfrm>
-          <a:prstGeom prst="rect">
-            <a:avLst/>
-          </a:prstGeom>
-          <a:noFill/>
-          <a:ln/>
-        </p:spPr>
-        <p:txBody>
-          <a:bodyPr wrap="square" lIns="0" tIns="0" rIns="0" bIns="0" rtlCol="0" anchor="ctr"/>
-          <a:lstStyle/>
-          <a:p>
-            <a:pPr algn="l" indent="0" marL="0">
-              <a:buNone/>
-            </a:pPr>
-            <a:r>
-              <a:rPr lang="en-US" sz="1700" b="1" dirty="0">
+          <a:p>
+            <a:pPr marL="342900" indent="-342900">
+              <a:lnSpc>
+                <a:spcPct val="102000"/>
+              </a:lnSpc>
+              <a:spcAft>
+                <a:spcPts val="500"/>
+              </a:spcAft>
+              <a:buSzPct val="100000"/>
+              <a:buChar char="•"/>
+            </a:pPr>
+            <a:r>
+              <a:rPr lang="en-US" sz="1250" dirty="0">
                 <a:solidFill>
                   <a:srgbClr val="1F2430"/>
-                </a:solidFill>
-                <a:latin typeface="Cambria" pitchFamily="34" charset="0"/>
-                <a:ea typeface="Cambria" pitchFamily="34" charset="-122"/>
-                <a:cs typeface="Cambria" pitchFamily="34" charset="-120"/>
-              </a:rPr>
-              <a:t>Runs on a $13 budget</a:t>
-            </a:r>
-            <a:endParaRPr lang="en-US" sz="1700" dirty="0"/>
-          </a:p>
-        </p:txBody>
-      </p:sp>
-      <p:sp>
-        <p:nvSpPr>
-          <p:cNvPr id="17" name="Text 12"/>
-          <p:cNvSpPr/>
-          <p:nvPr/>
-        </p:nvSpPr>
-        <p:spPr>
-          <a:xfrm>
-            <a:off x="6309360" y="3081528"/>
-            <a:ext cx="2057400" cy="960120"/>
-          </a:xfrm>
-          <a:prstGeom prst="rect">
-            <a:avLst/>
-          </a:prstGeom>
-          <a:noFill/>
-          <a:ln/>
-        </p:spPr>
-        <p:txBody>
-          <a:bodyPr wrap="square" lIns="0" tIns="0" rIns="0" bIns="0" rtlCol="0" anchor="t"/>
-          <a:lstStyle/>
-          <a:p>
-            <a:pPr algn="l" indent="0" marL="0">
-              <a:lnSpc>
-                <a:spcPct val="105000"/>
-              </a:lnSpc>
-              <a:buNone/>
-            </a:pPr>
-            <a:r>
-              <a:rPr lang="en-US" sz="1250" dirty="0">
-                <a:solidFill>
-                  <a:srgbClr val="64708A"/>
                 </a:solidFill>
                 <a:latin typeface="Calibri" pitchFamily="34" charset="0"/>
                 <a:ea typeface="Calibri" pitchFamily="34" charset="-122"/>
                 <a:cs typeface="Calibri" pitchFamily="34" charset="-120"/>
               </a:rPr>
-              <a:t>Every call uses GPT-4o-mini. Deterministic checks and tight per-question context keep a full exam within budget.</a:t>
+              <a:t>Per-question feedback written</a:t>
+            </a:r>
+            <a:endParaRPr lang="en-US" sz="1250" dirty="0"/>
+          </a:p>
+          <a:p>
+            <a:pPr marL="342900" indent="-342900">
+              <a:lnSpc>
+                <a:spcPct val="102000"/>
+              </a:lnSpc>
+              <a:spcAft>
+                <a:spcPts val="500"/>
+              </a:spcAft>
+              <a:buSzPct val="100000"/>
+              <a:buChar char="•"/>
+            </a:pPr>
+            <a:r>
+              <a:rPr lang="en-US" sz="1250" dirty="0">
+                <a:solidFill>
+                  <a:srgbClr val="1F2430"/>
+                </a:solidFill>
+                <a:latin typeface="Calibri" pitchFamily="34" charset="0"/>
+                <a:ea typeface="Calibri" pitchFamily="34" charset="-122"/>
+                <a:cs typeface="Calibri" pitchFamily="34" charset="-120"/>
+              </a:rPr>
+              <a:t>steps[] trace attached</a:t>
+            </a:r>
+            <a:endParaRPr lang="en-US" sz="1250" dirty="0"/>
+          </a:p>
+        </p:txBody>
+      </p:sp>
+      <p:sp>
+        <p:nvSpPr>
+          <p:cNvPr id="17" name="Text 14"/>
+          <p:cNvSpPr/>
+          <p:nvPr/>
+        </p:nvSpPr>
+        <p:spPr>
+          <a:xfrm>
+            <a:off x="548640" y="4663440"/>
+            <a:ext cx="8138160" cy="365760"/>
+          </a:xfrm>
+          <a:prstGeom prst="rect">
+            <a:avLst/>
+          </a:prstGeom>
+          <a:noFill/>
+          <a:ln/>
+        </p:spPr>
+        <p:txBody>
+          <a:bodyPr wrap="square" lIns="0" tIns="0" rIns="0" bIns="0" rtlCol="0" anchor="ctr"/>
+          <a:lstStyle/>
+          <a:p>
+            <a:pPr indent="0" marL="0">
+              <a:buNone/>
+            </a:pPr>
+            <a:r>
+              <a:rPr lang="en-US" sz="1250" i="1" dirty="0">
+                <a:solidFill>
+                  <a:srgbClr val="64708A"/>
+                </a:solidFill>
+                <a:latin typeface="Calibri" pitchFamily="34" charset="0"/>
+                <a:ea typeface="Calibri" pitchFamily="34" charset="-122"/>
+                <a:cs typeface="Calibri" pitchFamily="34" charset="-120"/>
+              </a:rPr>
+              <a:t>A working UI is part of the deliverable — submit, grade, and inspect the trace.</a:t>
             </a:r>
             <a:endParaRPr lang="en-US" sz="1250" dirty="0"/>
           </a:p>
